--- a/slide.pptx
+++ b/slide.pptx
@@ -5,13 +5,14 @@
     <p:sldMasterId id="2147483648" r:id="rId1"/>
   </p:sldMasterIdLst>
   <p:sldIdLst>
-    <p:sldId id="256" r:id="rId2"/>
-    <p:sldId id="257" r:id="rId3"/>
-    <p:sldId id="258" r:id="rId4"/>
-    <p:sldId id="259" r:id="rId5"/>
-    <p:sldId id="260" r:id="rId6"/>
-    <p:sldId id="261" r:id="rId7"/>
-    <p:sldId id="262" r:id="rId8"/>
+    <p:sldId id="258" r:id="rId2"/>
+    <p:sldId id="259" r:id="rId3"/>
+    <p:sldId id="260" r:id="rId4"/>
+    <p:sldId id="261" r:id="rId5"/>
+    <p:sldId id="262" r:id="rId6"/>
+    <p:sldId id="263" r:id="rId7"/>
+    <p:sldId id="264" r:id="rId8"/>
+    <p:sldId id="265" r:id="rId9"/>
   </p:sldIdLst>
   <p:sldSz cx="12192000" cy="6858000"/>
   <p:notesSz cx="6858000" cy="9144000"/>
@@ -110,6 +111,11 @@
       </a:defRPr>
     </a:lvl9pPr>
   </p:defaultTextStyle>
+  <p:extLst>
+    <p:ext uri="{EFAFB233-063F-42B5-8137-9DF3F51BA10A}">
+      <p15:sldGuideLst xmlns:p15="http://schemas.microsoft.com/office/powerpoint/2012/main"/>
+    </p:ext>
+  </p:extLst>
 </p:presentation>
 </file>
 
@@ -302,31 +308,122 @@
   <inkml:trace contextRef="#ctx0" brushRef="#br0" timeOffset="200601">1989 14142 23943,'-60'-2'403,"0"0"0,3 4 0,7 10-342,22 15 1,5 7-1882,-3 4 1,3 1 1830,4-7 0,1 2 9,-1 12 0,1 1-336,4 3 0,2-1 313,1-9 0,2 0 346,1 16 1,6-4-428,15-12 56,14 7 50,16-36 23,8-21 16,3-17 1,-28 6 0,-2-3 28,9-16 78,-18 8 0,-4 0-39,-5 0 1817,-15-30-1862,-14 37 1731,-18-3-1753,-7 19-29,-3 16 155,10 2-233,12 7 0,2 2-33,1 3-536,3 11 1,3 1-115,10-4-2012,4 30 226,14-39 2514,20 6 0,-17-18 0,10-1 0</inkml:trace>
   <inkml:trace contextRef="#ctx0" brushRef="#br0" timeOffset="200950">2091 14088 18742,'-29'-42'877,"-1"1"0,1 0 0,0 3 0,-1 3 0,-1 7-533,-8 10 1,-2 9-536,-3 1 1,-1 7 366,-2 6 1,-1 7-48,-10 13 0,2 5-113,17-6 1,1 3-341,3 4 0,0 5 1,4 0 348,0 10 0,3 5-35,8-10 0,1 5 0,-1 1 1,3-3 7,1-1 0,1-2 0,2 3-11,2 2 1,0 4-1,3-1 1,4-4-28,7 13 1,7-4 13,-1-11 0,3 0 0,4-4-5,17 10 0,8-8 25,8-10 1,5-9 8,-12-11 1,1-5 0,1-4 1,4-3 1,0-4 0,0-3 18,1-3 1,-1-2-1,-1-3 17,-1-3 0,-1-2 0,-2-4 24,-3-1 1,-2-2 0,-3-3 29,-2-1 0,-3-2 1,-2-2 6,-3-1 1,-2-2 0,-4-1-33,-2-1 1,-3-1 0,-2 0-49,-3 0 1,-3-1 0,-3 1-15,-5-21 0,-7 2-58,-8 4 0,-8 6-225,-10 8 1,-9 7-836,-10 10 1,-5 10 1109,1 8 0,2 6 0,15 2 0,4 2 0,-9 7 0</inkml:trace>
   <inkml:trace contextRef="#ctx0" brushRef="#br0" timeOffset="206940">3291 16567 13340,'19'-51'2055,"0"-1"1,-1 6 0,-4 6-852,-8 9-202,1-1-189,2-6-96,0 6-113,0 7-172,-4 10-141,-3 7-134,-1 6-124,-1 3 130,-1 7-7,-2 10-10,-3 18-51,-7 19-44,4-19 0,-1 2-547,-3 6 0,-1 1 513,-2 4 0,-1 1-12,0 0 1,-2 1 19,2 0 1,-1-1 18,2 0 1,0-1-42,2-3 0,3 0-327,1-2 0,2 0 335,3-3 0,2-1-192,2-1 0,3 0 181,3-2 0,2-1-12,2-2 1,3-1 19,4-4 1,3-3 25,29 15-29,-19-26 1,3-4 10,5-3 1,1-3-23,3-5 1,2-3-32,3-2 1,0-3-522,1-3 1,1-3-572,-1-1 1,1-3 1128,2-3 0,-4 1 0,6-3 0,-9 1 0</inkml:trace>
-  <inkml:trace contextRef="#ctx0" brushRef="#br0" timeOffset="221649">3556 17446 7397,'-5'1'7388,"0"-1"-3092,5 0-3456,-29 4-4414,22-3 3865,-22 3 1162,29-4-1206,0 0-197,6 0-16,0 0 61,29 0-67,-11 0 0,12 0 0,4-1-6,13-1-462,-13 1 0,-2-1 451,11-1 2208,13-4-2219,-33 3 28,24-4 6,-34 4 128,2 2 74,-15 1 1146,-10 1-1376,-9 0-12,-17 2-5,-15 4 6,-14 3 421,26-2 1,0-1-398,0 0 1,0 0-8,-16 3 10,-5 0 17,27-5 40,-5 1 44,16-4-56,10 0 0,2-1-72,4 0 16,7-1-17,9-3 23,17-4 0,14-2 5,10-1-11,1 1-11,-4 1 17,-10 4-11,-10 0-1,-12 4 18,-12 0 33,-7 1 33,-13 1-66,-9 2 10,-16 2 23,-7 1-22,0 1-23,12-3-39,7 0-269,15-1-1159,2 1 1456,14-1 0,-5-1 0,6 0 0</inkml:trace>
-  <inkml:trace contextRef="#ctx0" brushRef="#br0" timeOffset="225336">5576 17155 20005,'1'-48'1159,"1"0"1,0 1-1,2-19 1,-6 15-550,-11 29-240,-2 10-179,-8 4-147,4 12 29,-3 9-495,-1 23 0,-3 17 0,2-2 414,0 2 0,1 3-480,2-6 0,-3 6 0,0 2 0,4-5 392,4-1 1,4-3 0,1 1-206,1 1 0,1 0 1,1 0-783,2 0 0,1-1 0,0 0 185,2-1 0,0 0 0,0-2 117,-2 18 1,0-4 926,-2-11 0,-2-4 1008,-15 12 380,-6-35-855,-9-50-275,13-2 217,11-7 1,6-4-521,9 5 0,4-1-65,5-10 1,4-2-46,8-2 1,5 1 162,6 1 0,5 2-199,5 1 1,2 3-29,3 2 0,1 4-17,-1 3 1,0 2 19,-1 4 0,-2 1 42,-3 4 0,-2 0 57,-4 4 1,-3 1 3,20-12 2851,-17 5-2621,-14 5 736,-12 4-591,-6 3 998,-1 3-1042,-2 4 209,0 2-534,-1 2-5,-1 12-23,-1 7 11,-4 14-5,0 4-78,1 3-298,2-1-812,3 0-2005,1-6 3176,0-4 0,0-14 0,0-5 0</inkml:trace>
-  <inkml:trace contextRef="#ctx0" brushRef="#br0" timeOffset="225511">6004 17008 23870,'-13'-25'-5338,"8"22"3922,17 33 1,-5-11 0,-4-11 0</inkml:trace>
-  <inkml:trace contextRef="#ctx0" brushRef="#br0" timeOffset="226236">6162 17313 21483,'0'-5'4247,"1"1"-3637,-1 4-588,4 3 18,-3 19-24,3-2 12,-5 23 0,0-11 12,-3 3-29,0-8 78,1-10 23,0-9 129,3-9-112,4-13 67,21-34-106,2 5-444,-9 15 1,0 2 364,8-7-22,-2 8-12,0 6-38,8 1-68,2 10-347,9 15 213,-12 1-465,12 15-1261,-3 6 875,-5-5-1950,19 6-2202,2-16 3430,5-4 2062,-2-6 670,-3-13 1698,-16-7 593,5-11 219,-5-15-1927,-15 2-942,-7 1 275,-11 7 1,-8 8-589,-6 6-129,-12 12 23,-16 24-62,0 5-3,7-1 0,0 4-737,-1 4 0,2 0 686,4-5 1,1 0 22,-2 10 0,8-1-109,17-6 56,5 2 5,25-19 40,25-24-14,-25 2 0,1-2 22,9-9 0,-1-5-802,-6-2 1,-3-4 820,0-4 1,-4-2 0,-5 7 0,-2-2 390,2-12 1,-3-1-350,-4 5 1,0-2 6,-2 1 1,2-2-1,-2 2 89,3-8 0,-2 2 22,1-1 1,-3 4-26,-3 7 18,-5 13-197,-4 20 0,-3 3 1755,-2 17-1755,-7 19 0,2 5 0,-1 10 0,0 4 0,5-22 0,0 3-331,-4 20 0,-1 9 1,1-2-407,1 2 1,2 1-1176,0-3 0,2 3 0,1-3 1440,5 5 1,2-7 0,-1-18-1,1-6 1,7 2 0</inkml:trace>
-  <inkml:trace contextRef="#ctx0" brushRef="#br0" timeOffset="227295">8435 17253 24363,'13'-43'752,"0"0"1,-2 5-1,-2 9-545,-5 19-173,-2 8 11,-2 11 22,0 12-11,-2 17-17,-5 18-45,1-22 1,-2 2-1,-2 4 1,-2-1-228,-1 1 0,0 0 233,0-3 0,1-2 17,-9 22-28,6-18 55,8-19-38,6-17-6,10-23 28,11-16-14,-6 8 0,2-2-323,4-7 0,-1-1 342,2-5 1,0 0-6,0-2 0,-1 0 8,0 4 1,-1 0 2,-2 7 0,0 2 403,11-16-402,-5 18-29,-5 12-11,-1 11 11,3 9 0,4 10 681,2 13-697,-2 12 16,-8 16-23,-10-22 1,-3 2-188,-3 3 1,-3 0 201,-2 0 0,-1-2-20,-6 17-11,-6-2 17,11-30 11,-1 0 50,13-21-27,7-14 5,13-15-17,8-16-17,-14 20 1,1-1 94,0-1 0,-1 1-56,18-21-21,-4 13 10,-7 16-16,-6 11 16,-4 12-33,-2 9 11,2 10 22,1 8 203,1 8-203,4 3-22,2-1-28,7-6 17,5-8 17,5-12 5,2-10-34,1-13 18,-4-11 33,-4-14-11,-6-11 27,-7-5 63,-5-4-34,-8 3 22,-5 6 39,-3 10-11,-4 14-83,0 11-74,-6 10 40,-5 12-1,-8 13-22,-13 28 17,9-13-22,9-8 0,2 0-18,4 9-32,3 7-29,13-8-134,11-10-499,11-8-817,8-8-3132,5-6 4683,-3-4 0,-15-3 0,-10-1 0</inkml:trace>
-  <inkml:trace contextRef="#ctx0" brushRef="#br0" timeOffset="227929">10014 17109 19476,'10'-50'878,"-1"0"1,0 0-1,-1 5 1,1 0-1,-2 6-71,7-21 596,-4 15-927,-3 16 136,-3 12-444,-2 9 48,-2 5 92,0 3 78,-1 5-380,0 5-34,-1 1-101,-1 7-482,0-3-1343,0 8-6823,0 3 7929,0 0 0,1-10 0,1-6 0</inkml:trace>
-  <inkml:trace contextRef="#ctx0" brushRef="#br0" timeOffset="228769">10040 17095 23959,'13'-46'956,"1"0"0,-1 2 0,-2 8-721,-5 19 247,-1 4-426,-4 11-22,-1 2-23,-1 6 50,-7 22-44,0-3-28,-5 10 0,0 2 16,-2 1 9,1-2 0,-1 1-2,-3 8-35,-4 11 40,10-22 89,2-4-55,8-23 128,1-1 17,1-9-101,3-16-72,0 2 49,8-33-60,-4 23-1,9-29 106,6 6-105,-5 8-1,15-10-73,-2 26 12,4 3 50,-2 9 22,0 13-5,7 17-45,-8-2 31,-4 11 0,-2 3 8,-4 4-6,-2 0 1,-1 3-28,4 13-4,-8-18 1,1 0 5,2 1 1,1-2-3,18 12 33,-7-11-17,-6-19 34,-4-18 17,12-24-6,4-11-31,-12 8 1,-2-2-29,-1-1 1,-2-1-1675,2-6 1,-1 0 1701,-4 7 1,0 0 15,1-2 0,0-3 1,-1 4-78,-3 8 1,-1 0 80,10-29 0,-2 2-21,-9 9-7,1-7 0,-12 34 0,-1 12 0,-1 6 0,-2 9 0,-6 15 0,-7 20 0,1 3 0,1 8 0,0 2 0,8-22 0,0 1 0,-2 11 0,-1 6 0,2 0-442,3-2 0,1 1 1,2-1 144,-1 0 0,1 1 0,2-1 62,0-1 0,0-1 0,4-2-1905,9 19 1,3-7-567,3-3 2706,-1-8 0,-1-4 0,-7-20 0,2 6 0</inkml:trace>
-  <inkml:trace contextRef="#ctx0" brushRef="#br0" timeOffset="229228">10846 17491 15603,'-11'-50'1756,"0"-1"0,0 1 1,1 4-1,0 2 1,1 5-664,-6-18-354,3 14-330,6 11-230,9 6-134,12 2-34,18 2-34,19 1-242,-1 6 181,-13 6 0,4 1-456,5 1 0,1 2 498,0-2 0,1 1 31,-3 1 0,-2 1 2,-3-2 1,-5 1 86,0 0 57,3-2-7,-28 5 7,-19 4 281,-12 5-260,-3 2 942,-17 10-824,0 9-195,2 4-57,4 11-16,20-5 16,13 2-27,7-10-1,24 5 51,3-19-51,7 2 73,7-17 40,-20-11 22,6-11 39,-17-11-17,-8-8-11,-13-9-51,-7-5-769,-10 0 680,5 13-160,-6 3 160,14 24 0,-5 0 0,9 14-191,1 10-700,2 9-641,8 12-7558,7 7 8361,5-6 1,-4-12-1,-5-10 1</inkml:trace>
-  <inkml:trace contextRef="#ctx0" brushRef="#br0" timeOffset="229529">11740 16871 28671,'8'-47'-46,"11"25"26,-1 42 1,2 14-847,4 0 0,-1 2 678,1 3 1,0 1-7,-2 0 1,0 1 219,-4-4 1,-2-2-49,4 21 435,-16-22-267,-17-19 39,-10-23 11,0-15 807,7-20-852,11-11-61,17-6-91,-1 29 0,4 2-24,4 0 0,3 3-54,2 3 1,4 4-936,8 3 1,0 4-1474,16-1 1826,-18 11 0,-5 2 1,-10 1-1,-1 2 1</inkml:trace>
-  <inkml:trace contextRef="#ctx0" brushRef="#br0" timeOffset="230346">3281 17617 19160,'12'-56'1758,"0"1"1,-2 6-1,-1 6-918,-1 10-481,-4 16-241,-3 12 0,-1 19 55,-6 20-100,-1-2 0,-1 5-786,-6 13 1,-3 6 727,3-11 0,-1 2 0,0 1-571,-2 6 1,-1 2-1,1 0 524,1 0 0,1 2 1,1-2 14,3-2 0,2-1 1,3-2 10,6-6 0,4-2 1,1-2 21,3 4 1,8-5-460,28 4 1,10-9 428,-6-15 0,4-5 23,0-1 0,5 0 1,-3-4-24,6-2 0,3-5-222,-14-3 1,5-3 0,1-1-1,-4 0-1392,3-2 0,-2 0 0,1-2 1374,-2 1 0,3 0 0,-2-1 0,-6 1 0,9-3 0,-8 0 0,9-2 1</inkml:trace>
-  <inkml:trace contextRef="#ctx0" brushRef="#br0" timeOffset="230869">6017 18177 23349,'-20'46'778,"19"-12"-767,31-35 1,10-9-91,18 0-1261,-4-3 0,3-1 1006,-16 4 1,1 2-250,8-1 1,0 0-523,-6 4 1,-4 2-5712,18 5 6816,-25 4 0,-20 0 0,-10-1 0</inkml:trace>
-  <inkml:trace contextRef="#ctx0" brushRef="#br0" timeOffset="231153">6291 18262 25707,'-16'-12'-17,"14"13"34,34 31-45,5 11-28,-2 7 34,-9 4-396,-13 0 334,-23 0 39,-21-1 45,8-29 0,-3-2 0,-2-1 0,-2-3 0,1-2 0,-1-2-79,-23 9-558,5-7-1362,12-6-2281,17-13 4280,32-20 0,-7 9 0,15-8 0</inkml:trace>
-  <inkml:trace contextRef="#ctx0" brushRef="#br0" timeOffset="231545">6996 18321 23999,'-47'7'690,"0"0"1,5-1 0,5 2-540,6 5-83,7 6-68,8 7-17,5 8 11,6 6 17,10 0 6,8-2-22,11-8-12,10-9-17,1-12 73,1-10 45,-3-11 17,-4-12 67,-4-8 62,-6-6 5,-8-2-33,-9 3 5,-11 2-62,-7 5-111,-9 8 5,-5 8 28,-2 8-50,0 8-78,6 5-107,8 5-269,7 6-734,6 4-1500,13 5-4807,10-1 6630,8-4 0,-8-10 0,-6-6 0</inkml:trace>
-  <inkml:trace contextRef="#ctx0" brushRef="#br0" timeOffset="231995">7369 18168 26441,'-34'-16'134,"-1"1"1,-20 2-113,51 60 0,6 12-22,0-25 0,2 1-377,2 1 1,-1 2 359,1-2 0,0 2-1508,0 4 0,-2-2 1525,1 13-203,-3 8 309,-6-42-33,-1 1 117,-5-17 348,1-10-398,-1-6 3290,4-13-3234,3-6 336,11-7-459,8-2-17,14-2-67,8 5 0,5 8 11,6 11 28,-19 10-17,3 14-22,-18 6 16,3 10-22,-7 3 12,-12 12-1,-6-9-44,-21 13-34,-12-11-6,13-11 1,-2-2-77,-1-1 1,0-2-1162,-27 7-1026,23-12 309,11-7 2044,26-13 0,-2 6 0,4-4 0</inkml:trace>
-  <inkml:trace contextRef="#ctx0" brushRef="#br0" timeOffset="232495">8020 18293 26497,'-42'-18'222,"1"0"0,1 2 0,12 9-132,23 20-57,0 2 40,-1 14 34,2 2-40,0 17-95,5-7 0,7 3 45,3-20-1,9 2 1,3-9 0,16 4-34,-7-9 17,1-1-89,-19-7-85,-6 1-957,-15 6 318,-3-3-3556,-32 7-962,5-11 1975,-8-2-2177,11-14 4541,19-20 992,3 4 3383,19-30-935,1 30 4189,13-29-5164,-11 33 857,4-13 23,-9 16-1345,-1 4-353,-3 6-419,-3 10-180,-1 3-3348,-14 20 3281,4-4-409,-9 11 1,-4 4-1914,3-6 0,0 1 2333,-9 9 0,2-1 0,-6 6 0,15-17 0</inkml:trace>
-  <inkml:trace contextRef="#ctx0" brushRef="#br0" timeOffset="239120">2078 17364 14471,'1'-6'5837,"0"2"-3530,-1 4-1707,14-61-264,-11 46-219,7-44-89,-20 69-11,-14 12 0,0 0 0,-3 0-1,-13 12 1,6-9 0,-2-1-279,-13 5 301,18-13 0,0-1 101,-22 8 67,10-11 17,14-8-22,13-9-29,8-3-27,6-4-34,1 2-22,1 3 267,0 3-346,1 2 12,1 1-29,4 0-16,3 4 27,1 3 23,0 9 23,-2 11 11,-2 11-12,-11 8-27,-6 5-6,-8 0 44,-1-6-50,2-8-61,6-11 84,4-10 117,5-8-11,2-5-51,3-10-33,9-11-33,-2 1 5,17-21-28,-12 21-11,18-14-34,-5 14 90,18-2-29,-12 7-10,14 3-62,-15 8-17,5 3-61,-8 7-96,-12 10-174,-13 12-363,-17 12-734,-16 8-200,9-22 1,-4 0-1904,-2 0 0,0-1 3604,2-3 0,2-3 0,-7 6 0,13-14 0</inkml:trace>
-  <inkml:trace contextRef="#ctx0" brushRef="#br0" timeOffset="239545">1881 17114 22319,'-16'-52'625,"0"0"0,-2 1 1,-3 13-481,-12 26-61,-21 15-62,7 18 1,-3 10-2828,2 5 0,2 4 2814,13-12 0,1 2 1,1 2-7,1 7 1,3 2 0,2 0 124,-2 14 0,4 2-141,5-11 0,1 4 0,3-1-6,2-1 0,3 0 1,3 0-24,3-5 1,3 0 0,5 0-8,6-1 1,6 0 0,1-5 42,2 1 1,4-5 283,21 2 0,6-8-253,-11-17 1,4-6-8,2-5 1,3-2 0,-1-3 27,-5-1 1,-1-3 0,0-1-271,6-6 1,0-2-1,-4-1 280,-1-3 0,-5-2 126,1-7 0,-5-4 860,-13 7 0,-4-3-905,1-7 0,-4-2 379,-6 1 0,-5-1-466,-10-8 1,-5 1-40,4 15 0,-2 2-8,-10-10 0,-4 4-93,-13 6-300,5 18 1,-3 7-451,3 9 0,0 7-2112,-9 8 1,1 5 2951,10 1 0,3 0 0,-9 10 0,17-15 0</inkml:trace>
-  <inkml:trace contextRef="#ctx0" brushRef="#br0" timeOffset="240673">2350 18176 23142,'-53'-13'325,"6"15"-303,19 43-89,3 7 0,5 6-965,6-4 948,7-4 28,11-11-17,8-11 395,9-12-282,6-8 130,2-10-86,0-8 39,-4-8 73,-4-7 590,-8 0-450,-5 1-28,-8 5-107,-9 5-61,-8 6-45,-9 3-89,-6 9-12,-1 3-10,1 7-57,6 1-151,9 0-420,8 3-902,4-2-2073,9-1 3619,8-6 0,-5-5 0,4-3 0</inkml:trace>
-  <inkml:trace contextRef="#ctx0" brushRef="#br0" timeOffset="241048">2589 17962 15020,'-6'-5'2739,"-24"-11"0,-9 0-1692,-6 9-1443,-5-4 1,-3 4 647,18 13 0,2 5-129,-1 3 0,0 5-5,1 2 0,2 3-121,0 6 0,2 3-36,1 5 0,1 3-401,1 5 1,2 2 391,2 3 1,2 1-4,4-1 1,3-1-82,4-5 1,6-1 63,5-8 1,7-2-39,22 15 33,24-21 67,-20-21 1,3-5 65,4-6 0,1-5 18,4-4 1,-1-5 38,1-4 1,-1-4 36,-3-3 0,-2-2 56,-5-2 0,-4-1 33,-4-1 1,-4-1-45,-6 0 0,-4-2-152,-4 2 1,-4-1 14,-7 1 0,-4 0 419,-5 2 1,-3 3-521,-6 2 0,-3 3-205,-4 6 0,-2 4-1262,-31-4-6185,-1 21 7691,10 7 0,20 1 0,15-3 0</inkml:trace>
-  <inkml:trace contextRef="#ctx0" brushRef="#br0" timeOffset="242506">1360 12630 16315,'-44'-12'1133,"0"0"0,1 0 1,8 1 903,21 3-1461,2-5 76,15-8-411,18-7-57,22-9-1583,-1 12 1,4 2 1423,-13 6 0,1 2 11,19-4 1,0 4 189,-19 9 0,-1 5-195,6 1 0,-1 5 0,-5 3 0,-3 5-92,-5 6 1,-3 5 82,-4 3 1,-5 4 8,-2 4 0,-5 3-20,-5 4 0,-4 1-17,-3 3 1,-4 2-349,-2 1 1,-3 0 249,0 0 1,-1-1-163,1-5 0,1 0 1180,3-6 0,1-2-2913,-1 22-1743,6-15 3742,6-9 0,-1-17 0,2-6 0</inkml:trace>
-  <inkml:trace contextRef="#ctx0" brushRef="#br0" timeOffset="243032">1408 12884 11066,'-4'0'7046,"0"0"-2515,4 0-4234,-7-23-134,29 0-68,8-22-81,2 23 0,6 2-469,3-2 1,1 0 457,4-1 0,0 1 0,1 2-1,-1 0 1,-2 3 0,-2 1-70,-5 4 1,-3 1 49,14-2 45,-22 9 45,-25 11-6,-23 9-56,-23 10-5,14-9 0,-2 0-25,-6 3 0,-2 1 25,-3 2 0,0 0 2,-2 0 0,1 1 6,2-1 0,1-1 21,4-2 0,3-1 43,-18 9-27,20-10 27,18-9 79,11-8-23,14-9 913,14-11-986,23-14-47,-14 10 0,3-1-410,5-2 1,1 0 420,3-1 1,-1 0 13,-1 3 0,0 2-22,-6 3 0,-2 2-29,21-8-49,-19 11-51,-19 7-79,-14 9-245,-15 6-533,-11 7-109,-12 4-3352,-5 3 4430,-7 0 0,22-10 0,2-2 0</inkml:trace>
-  <inkml:trace contextRef="#ctx0" brushRef="#br0" timeOffset="243373">1309 12643 14762,'-4'-3'6189,"1"1"-3393,3 2-2460,-21-62-90,38 32-159,-12-11 0,6 1-2115,27 20 0,6 7 2053,-14 2 0,0 2 14,13-1 1,-1 5 878,6 14-840,6 11 12,-9 19-1196,-25-6 1,-2 2 1116,4 15 5,-12-10 1,-2 1-177,-4 18 174,-2-22 0,0 1-6,-2 0 0,0-1-19,-2 0 0,0-1-56,0-3 0,-2 0 1874,-5 27-2479,-2-9-621,-1-8-1312,0-8-4002,1-10 6607,5-10 0,3-8 0,2-5 0</inkml:trace>
-  <inkml:trace contextRef="#ctx0" brushRef="#br0" timeOffset="243748">1400 12643 10612,'-6'0'7236,"2"-1"-2861,4 1-3977,-19-53 84,55 20-362,-26-2 0,2 1-75,16 18 0,6 5 95,27-6-17,-14 10-45,-12 7 1,0 3 5,19 13-34,-7 6 85,-18 22 10,-19 6-426,-7-15 1,-2 2 324,-4 2 1,-3 1-11,-2 0 0,-1 0-20,-1 0 0,0-2-159,0-3 1,1 0 99,-4 26-179,5-11-1506,6-8-1933,6-17-455,2-9 4118,3-12 0,-5-4 0,0 0 0</inkml:trace>
-  <inkml:trace contextRef="#ctx0" brushRef="#br0" timeOffset="243974">1429 12853 11323,'-8'2'9544,"2"0"-8126,6-2-360,0 0-380,2-8-549,20-3-43,17-10 1,8-3-73,1 3 0,1 0-407,-10 4 1,2-1 0,-1 1 218,17-8 0,-2 0-4742,-5 4 1,-3 1 3918,-10 4 1,-2 0 0,-2 2 0,-7 3 0,-17 8 0</inkml:trace>
-  <inkml:trace contextRef="#ctx0" brushRef="#br0" timeOffset="2.14748E7">14564 7017 24575,'0'0'0</inkml:trace>
+  <inkml:trace contextRef="#ctx0" brushRef="#br0" timeOffset="-207847.73">3556 17446 7397,'-5'1'7388,"0"-1"-3092,5 0-3456,-29 4-4414,22-3 3865,-22 3 1162,29-4-1206,0 0-197,6 0-16,0 0 61,29 0-67,-11 0 0,12 0 0,4-1-6,13-1-462,-13 1 0,-2-1 451,11-1 2208,13-4-2219,-33 3 28,24-4 6,-34 4 128,2 2 74,-15 1 1146,-10 1-1376,-9 0-12,-17 2-5,-15 4 6,-14 3 421,26-2 1,0-1-398,0 0 1,0 0-8,-16 3 10,-5 0 17,27-5 40,-5 1 44,16-4-56,10 0 0,2-1-72,4 0 16,7-1-17,9-3 23,17-4 0,14-2 5,10-1-11,1 1-11,-4 1 17,-10 4-11,-10 0-1,-12 4 18,-12 0 33,-7 1 33,-13 1-66,-9 2 10,-16 2 23,-7 1-22,0 1-23,12-3-39,7 0-269,15-1-1159,2 1 1456,14-1 0,-5-1 0,6 0 0</inkml:trace>
+  <inkml:trace contextRef="#ctx0" brushRef="#br0" timeOffset="-204160.73">5576 17155 20005,'1'-48'1159,"1"0"1,0 1-1,2-19 1,-6 15-550,-11 29-240,-2 10-179,-8 4-147,4 12 29,-3 9-495,-1 23 0,-3 17 0,2-2 414,0 2 0,1 3-480,2-6 0,-3 6 0,0 2 0,4-5 392,4-1 1,4-3 0,1 1-206,1 1 0,1 0 1,1 0-783,2 0 0,1-1 0,0 0 185,2-1 0,0 0 0,0-2 117,-2 18 1,0-4 926,-2-11 0,-2-4 1008,-15 12 380,-6-35-855,-9-50-275,13-2 217,11-7 1,6-4-521,9 5 0,4-1-65,5-10 1,4-2-46,8-2 1,5 1 162,6 1 0,5 2-199,5 1 1,2 3-29,3 2 0,1 4-17,-1 3 1,0 2 19,-1 4 0,-2 1 42,-3 4 0,-2 0 57,-4 4 1,-3 1 3,20-12 2851,-17 5-2621,-14 5 736,-12 4-591,-6 3 998,-1 3-1042,-2 4 209,0 2-534,-1 2-5,-1 12-23,-1 7 11,-4 14-5,0 4-78,1 3-298,2-1-812,3 0-2005,1-6 3176,0-4 0,0-14 0,0-5 0</inkml:trace>
+  <inkml:trace contextRef="#ctx0" brushRef="#br0" timeOffset="-203985.73">6004 17008 23870,'-13'-25'-5338,"8"22"3922,17 33 1,-5-11 0,-4-11 0</inkml:trace>
+  <inkml:trace contextRef="#ctx0" brushRef="#br0" timeOffset="-203260.73">6162 17313 21483,'0'-5'4247,"1"1"-3637,-1 4-588,4 3 18,-3 19-24,3-2 12,-5 23 0,0-11 12,-3 3-29,0-8 78,1-10 23,0-9 129,3-9-112,4-13 67,21-34-106,2 5-444,-9 15 1,0 2 364,8-7-22,-2 8-12,0 6-38,8 1-68,2 10-347,9 15 213,-12 1-465,12 15-1261,-3 6 875,-5-5-1950,19 6-2202,2-16 3430,5-4 2062,-2-6 670,-3-13 1698,-16-7 593,5-11 219,-5-15-1927,-15 2-942,-7 1 275,-11 7 1,-8 8-589,-6 6-129,-12 12 23,-16 24-62,0 5-3,7-1 0,0 4-737,-1 4 0,2 0 686,4-5 1,1 0 22,-2 10 0,8-1-109,17-6 56,5 2 5,25-19 40,25-24-14,-25 2 0,1-2 22,9-9 0,-1-5-802,-6-2 1,-3-4 820,0-4 1,-4-2 0,-5 7 0,-2-2 390,2-12 1,-3-1-350,-4 5 1,0-2 6,-2 1 1,2-2-1,-2 2 89,3-8 0,-2 2 22,1-1 1,-3 4-26,-3 7 18,-5 13-197,-4 20 0,-3 3 1755,-2 17-1755,-7 19 0,2 5 0,-1 10 0,0 4 0,5-22 0,0 3-331,-4 20 0,-1 9 1,1-2-407,1 2 1,2 1-1176,0-3 0,2 3 0,1-3 1440,5 5 1,2-7 0,-1-18-1,1-6 1,7 2 0</inkml:trace>
+  <inkml:trace contextRef="#ctx0" brushRef="#br0" timeOffset="-202201.73">8435 17253 24363,'13'-43'752,"0"0"1,-2 5-1,-2 9-545,-5 19-173,-2 8 11,-2 11 22,0 12-11,-2 17-17,-5 18-45,1-22 1,-2 2-1,-2 4 1,-2-1-228,-1 1 0,0 0 233,0-3 0,1-2 17,-9 22-28,6-18 55,8-19-38,6-17-6,10-23 28,11-16-14,-6 8 0,2-2-323,4-7 0,-1-1 342,2-5 1,0 0-6,0-2 0,-1 0 8,0 4 1,-1 0 2,-2 7 0,0 2 403,11-16-402,-5 18-29,-5 12-11,-1 11 11,3 9 0,4 10 681,2 13-697,-2 12 16,-8 16-23,-10-22 1,-3 2-188,-3 3 1,-3 0 201,-2 0 0,-1-2-20,-6 17-11,-6-2 17,11-30 11,-1 0 50,13-21-27,7-14 5,13-15-17,8-16-17,-14 20 1,1-1 94,0-1 0,-1 1-56,18-21-21,-4 13 10,-7 16-16,-6 11 16,-4 12-33,-2 9 11,2 10 22,1 8 203,1 8-203,4 3-22,2-1-28,7-6 17,5-8 17,5-12 5,2-10-34,1-13 18,-4-11 33,-4-14-11,-6-11 27,-7-5 63,-5-4-34,-8 3 22,-5 6 39,-3 10-11,-4 14-83,0 11-74,-6 10 40,-5 12-1,-8 13-22,-13 28 17,9-13-22,9-8 0,2 0-18,4 9-32,3 7-29,13-8-134,11-10-499,11-8-817,8-8-3132,5-6 4683,-3-4 0,-15-3 0,-10-1 0</inkml:trace>
+  <inkml:trace contextRef="#ctx0" brushRef="#br0" timeOffset="-201567.73">10014 17109 19476,'10'-50'878,"-1"0"1,0 0-1,-1 5 1,1 0-1,-2 6-71,7-21 596,-4 15-927,-3 16 136,-3 12-444,-2 9 48,-2 5 92,0 3 78,-1 5-380,0 5-34,-1 1-101,-1 7-482,0-3-1343,0 8-6823,0 3 7929,0 0 0,1-10 0,1-6 0</inkml:trace>
+  <inkml:trace contextRef="#ctx0" brushRef="#br0" timeOffset="-200727.73">10040 17095 23959,'13'-46'956,"1"0"0,-1 2 0,-2 8-721,-5 19 247,-1 4-426,-4 11-22,-1 2-23,-1 6 50,-7 22-44,0-3-28,-5 10 0,0 2 16,-2 1 9,1-2 0,-1 1-2,-3 8-35,-4 11 40,10-22 89,2-4-55,8-23 128,1-1 17,1-9-101,3-16-72,0 2 49,8-33-60,-4 23-1,9-29 106,6 6-105,-5 8-1,15-10-73,-2 26 12,4 3 50,-2 9 22,0 13-5,7 17-45,-8-2 31,-4 11 0,-2 3 8,-4 4-6,-2 0 1,-1 3-28,4 13-4,-8-18 1,1 0 5,2 1 1,1-2-3,18 12 33,-7-11-17,-6-19 34,-4-18 17,12-24-6,4-11-31,-12 8 1,-2-2-29,-1-1 1,-2-1-1675,2-6 1,-1 0 1701,-4 7 1,0 0 15,1-2 0,0-3 1,-1 4-78,-3 8 1,-1 0 80,10-29 0,-2 2-21,-9 9-7,1-7 0,-12 34 0,-1 12 0,-1 6 0,-2 9 0,-6 15 0,-7 20 0,1 3 0,1 8 0,0 2 0,8-22 0,0 1 0,-2 11 0,-1 6 0,2 0-442,3-2 0,1 1 1,2-1 144,-1 0 0,1 1 0,2-1 62,0-1 0,0-1 0,4-2-1905,9 19 1,3-7-567,3-3 2706,-1-8 0,-1-4 0,-7-20 0,2 6 0</inkml:trace>
+  <inkml:trace contextRef="#ctx0" brushRef="#br0" timeOffset="-200268.73">10846 17491 15603,'-11'-50'1756,"0"-1"0,0 1 1,1 4-1,0 2 1,1 5-664,-6-18-354,3 14-330,6 11-230,9 6-134,12 2-34,18 2-34,19 1-242,-1 6 181,-13 6 0,4 1-456,5 1 0,1 2 498,0-2 0,1 1 31,-3 1 0,-2 1 2,-3-2 1,-5 1 86,0 0 57,3-2-7,-28 5 7,-19 4 281,-12 5-260,-3 2 942,-17 10-824,0 9-195,2 4-57,4 11-16,20-5 16,13 2-27,7-10-1,24 5 51,3-19-51,7 2 73,7-17 40,-20-11 22,6-11 39,-17-11-17,-8-8-11,-13-9-51,-7-5-769,-10 0 680,5 13-160,-6 3 160,14 24 0,-5 0 0,9 14-191,1 10-700,2 9-641,8 12-7558,7 7 8361,5-6 1,-4-12-1,-5-10 1</inkml:trace>
+  <inkml:trace contextRef="#ctx0" brushRef="#br0" timeOffset="-199967.73">11740 16871 28671,'8'-47'-46,"11"25"26,-1 42 1,2 14-847,4 0 0,-1 2 678,1 3 1,0 1-7,-2 0 1,0 1 219,-4-4 1,-2-2-49,4 21 435,-16-22-267,-17-19 39,-10-23 11,0-15 807,7-20-852,11-11-61,17-6-91,-1 29 0,4 2-24,4 0 0,3 3-54,2 3 1,4 4-936,8 3 1,0 4-1474,16-1 1826,-18 11 0,-5 2 1,-10 1-1,-1 2 1</inkml:trace>
+  <inkml:trace contextRef="#ctx0" brushRef="#br0" timeOffset="-199150.73">3281 17617 19160,'12'-56'1758,"0"1"1,-2 6-1,-1 6-918,-1 10-481,-4 16-241,-3 12 0,-1 19 55,-6 20-100,-1-2 0,-1 5-786,-6 13 1,-3 6 727,3-11 0,-1 2 0,0 1-571,-2 6 1,-1 2-1,1 0 524,1 0 0,1 2 1,1-2 14,3-2 0,2-1 1,3-2 10,6-6 0,4-2 1,1-2 21,3 4 1,8-5-460,28 4 1,10-9 428,-6-15 0,4-5 23,0-1 0,5 0 1,-3-4-24,6-2 0,3-5-222,-14-3 1,5-3 0,1-1-1,-4 0-1392,3-2 0,-2 0 0,1-2 1374,-2 1 0,3 0 0,-2-1 0,-6 1 0,9-3 0,-8 0 0,9-2 1</inkml:trace>
+  <inkml:trace contextRef="#ctx0" brushRef="#br0" timeOffset="-198627.73">6017 18177 23349,'-20'46'778,"19"-12"-767,31-35 1,10-9-91,18 0-1261,-4-3 0,3-1 1006,-16 4 1,1 2-250,8-1 1,0 0-523,-6 4 1,-4 2-5712,18 5 6816,-25 4 0,-20 0 0,-10-1 0</inkml:trace>
+  <inkml:trace contextRef="#ctx0" brushRef="#br0" timeOffset="-198343.73">6291 18262 25707,'-16'-12'-17,"14"13"34,34 31-45,5 11-28,-2 7 34,-9 4-396,-13 0 334,-23 0 39,-21-1 45,8-29 0,-3-2 0,-2-1 0,-2-3 0,1-2 0,-1-2-79,-23 9-558,5-7-1362,12-6-2281,17-13 4280,32-20 0,-7 9 0,15-8 0</inkml:trace>
+  <inkml:trace contextRef="#ctx0" brushRef="#br0" timeOffset="-197951.73">6996 18321 23999,'-47'7'690,"0"0"1,5-1 0,5 2-540,6 5-83,7 6-68,8 7-17,5 8 11,6 6 17,10 0 6,8-2-22,11-8-12,10-9-17,1-12 73,1-10 45,-3-11 17,-4-12 67,-4-8 62,-6-6 5,-8-2-33,-9 3 5,-11 2-62,-7 5-111,-9 8 5,-5 8 28,-2 8-50,0 8-78,6 5-107,8 5-269,7 6-734,6 4-1500,13 5-4807,10-1 6630,8-4 0,-8-10 0,-6-6 0</inkml:trace>
+  <inkml:trace contextRef="#ctx0" brushRef="#br0" timeOffset="-197501.73">7369 18168 26441,'-34'-16'134,"-1"1"1,-20 2-113,51 60 0,6 12-22,0-25 0,2 1-377,2 1 1,-1 2 359,1-2 0,0 2-1508,0 4 0,-2-2 1525,1 13-203,-3 8 309,-6-42-33,-1 1 117,-5-17 348,1-10-398,-1-6 3290,4-13-3234,3-6 336,11-7-459,8-2-17,14-2-67,8 5 0,5 8 11,6 11 28,-19 10-17,3 14-22,-18 6 16,3 10-22,-7 3 12,-12 12-1,-6-9-44,-21 13-34,-12-11-6,13-11 1,-2-2-77,-1-1 1,0-2-1162,-27 7-1026,23-12 309,11-7 2044,26-13 0,-2 6 0,4-4 0</inkml:trace>
+  <inkml:trace contextRef="#ctx0" brushRef="#br0" timeOffset="-197001.73">8020 18293 26497,'-42'-18'222,"1"0"0,1 2 0,12 9-132,23 20-57,0 2 40,-1 14 34,2 2-40,0 17-95,5-7 0,7 3 45,3-20-1,9 2 1,3-9 0,16 4-34,-7-9 17,1-1-89,-19-7-85,-6 1-957,-15 6 318,-3-3-3556,-32 7-962,5-11 1975,-8-2-2177,11-14 4541,19-20 992,3 4 3383,19-30-935,1 30 4189,13-29-5164,-11 33 857,4-13 23,-9 16-1345,-1 4-353,-3 6-419,-3 10-180,-1 3-3348,-14 20 3281,4-4-409,-9 11 1,-4 4-1914,3-6 0,0 1 2333,-9 9 0,2-1 0,-6 6 0,15-17 0</inkml:trace>
+  <inkml:trace contextRef="#ctx0" brushRef="#br0" timeOffset="-190376.73">2078 17364 14471,'1'-6'5837,"0"2"-3530,-1 4-1707,14-61-264,-11 46-219,7-44-89,-20 69-11,-14 12 0,0 0 0,-3 0-1,-13 12 1,6-9 0,-2-1-279,-13 5 301,18-13 0,0-1 101,-22 8 67,10-11 17,14-8-22,13-9-29,8-3-27,6-4-34,1 2-22,1 3 267,0 3-346,1 2 12,1 1-29,4 0-16,3 4 27,1 3 23,0 9 23,-2 11 11,-2 11-12,-11 8-27,-6 5-6,-8 0 44,-1-6-50,2-8-61,6-11 84,4-10 117,5-8-11,2-5-51,3-10-33,9-11-33,-2 1 5,17-21-28,-12 21-11,18-14-34,-5 14 90,18-2-29,-12 7-10,14 3-62,-15 8-17,5 3-61,-8 7-96,-12 10-174,-13 12-363,-17 12-734,-16 8-200,9-22 1,-4 0-1904,-2 0 0,0-1 3604,2-3 0,2-3 0,-7 6 0,13-14 0</inkml:trace>
+  <inkml:trace contextRef="#ctx0" brushRef="#br0" timeOffset="-189951.73">1881 17114 22319,'-16'-52'625,"0"0"0,-2 1 1,-3 13-481,-12 26-61,-21 15-62,7 18 1,-3 10-2828,2 5 0,2 4 2814,13-12 0,1 2 1,1 2-7,1 7 1,3 2 0,2 0 124,-2 14 0,4 2-141,5-11 0,1 4 0,3-1-6,2-1 0,3 0 1,3 0-24,3-5 1,3 0 0,5 0-8,6-1 1,6 0 0,1-5 42,2 1 1,4-5 283,21 2 0,6-8-253,-11-17 1,4-6-8,2-5 1,3-2 0,-1-3 27,-5-1 1,-1-3 0,0-1-271,6-6 1,0-2-1,-4-1 280,-1-3 0,-5-2 126,1-7 0,-5-4 860,-13 7 0,-4-3-905,1-7 0,-4-2 379,-6 1 0,-5-1-466,-10-8 1,-5 1-40,4 15 0,-2 2-8,-10-10 0,-4 4-93,-13 6-300,5 18 1,-3 7-451,3 9 0,0 7-2112,-9 8 1,1 5 2951,10 1 0,3 0 0,-9 10 0,17-15 0</inkml:trace>
+  <inkml:trace contextRef="#ctx0" brushRef="#br0" timeOffset="-188823.73">2350 18176 23142,'-53'-13'325,"6"15"-303,19 43-89,3 7 0,5 6-965,6-4 948,7-4 28,11-11-17,8-11 395,9-12-282,6-8 130,2-10-86,0-8 39,-4-8 73,-4-7 590,-8 0-450,-5 1-28,-8 5-107,-9 5-61,-8 6-45,-9 3-89,-6 9-12,-1 3-10,1 7-57,6 1-151,9 0-420,8 3-902,4-2-2073,9-1 3619,8-6 0,-5-5 0,4-3 0</inkml:trace>
+  <inkml:trace contextRef="#ctx0" brushRef="#br0" timeOffset="-188448.73">2589 17962 15020,'-6'-5'2739,"-24"-11"0,-9 0-1692,-6 9-1443,-5-4 1,-3 4 647,18 13 0,2 5-129,-1 3 0,0 5-5,1 2 0,2 3-121,0 6 0,2 3-36,1 5 0,1 3-401,1 5 1,2 2 391,2 3 1,2 1-4,4-1 1,3-1-82,4-5 1,6-1 63,5-8 1,7-2-39,22 15 33,24-21 67,-20-21 1,3-5 65,4-6 0,1-5 18,4-4 1,-1-5 38,1-4 1,-1-4 36,-3-3 0,-2-2 56,-5-2 0,-4-1 33,-4-1 1,-4-1-45,-6 0 0,-4-2-152,-4 2 1,-4-1 14,-7 1 0,-4 0 419,-5 2 1,-3 3-521,-6 2 0,-3 3-205,-4 6 0,-2 4-1262,-31-4-6185,-1 21 7691,10 7 0,20 1 0,15-3 0</inkml:trace>
+  <inkml:trace contextRef="#ctx0" brushRef="#br0" timeOffset="-186990.73">1360 12630 16315,'-44'-12'1133,"0"0"0,1 0 1,8 1 903,21 3-1461,2-5 76,15-8-411,18-7-57,22-9-1583,-1 12 1,4 2 1423,-13 6 0,1 2 11,19-4 1,0 4 189,-19 9 0,-1 5-195,6 1 0,-1 5 0,-5 3 0,-3 5-92,-5 6 1,-3 5 82,-4 3 1,-5 4 8,-2 4 0,-5 3-20,-5 4 0,-4 1-17,-3 3 1,-4 2-349,-2 1 1,-3 0 249,0 0 1,-1-1-163,1-5 0,1 0 1180,3-6 0,1-2-2913,-1 22-1743,6-15 3742,6-9 0,-1-17 0,2-6 0</inkml:trace>
+  <inkml:trace contextRef="#ctx0" brushRef="#br0" timeOffset="-186464.73">1408 12884 11066,'-4'0'7046,"0"0"-2515,4 0-4234,-7-23-134,29 0-68,8-22-81,2 23 0,6 2-469,3-2 1,1 0 457,4-1 0,0 1 0,1 2-1,-1 0 1,-2 3 0,-2 1-70,-5 4 1,-3 1 49,14-2 45,-22 9 45,-25 11-6,-23 9-56,-23 10-5,14-9 0,-2 0-25,-6 3 0,-2 1 25,-3 2 0,0 0 2,-2 0 0,1 1 6,2-1 0,1-1 21,4-2 0,3-1 43,-18 9-27,20-10 27,18-9 79,11-8-23,14-9 913,14-11-986,23-14-47,-14 10 0,3-1-410,5-2 1,1 0 420,3-1 1,-1 0 13,-1 3 0,0 2-22,-6 3 0,-2 2-29,21-8-49,-19 11-51,-19 7-79,-14 9-245,-15 6-533,-11 7-109,-12 4-3352,-5 3 4430,-7 0 0,22-10 0,2-2 0</inkml:trace>
+  <inkml:trace contextRef="#ctx0" brushRef="#br0" timeOffset="-186123.73">1309 12643 14762,'-4'-3'6189,"1"1"-3393,3 2-2460,-21-62-90,38 32-159,-12-11 0,6 1-2115,27 20 0,6 7 2053,-14 2 0,0 2 14,13-1 1,-1 5 878,6 14-840,6 11 12,-9 19-1196,-25-6 1,-2 2 1116,4 15 5,-12-10 1,-2 1-177,-4 18 174,-2-22 0,0 1-6,-2 0 0,0-1-19,-2 0 0,0-1-56,0-3 0,-2 0 1874,-5 27-2479,-2-9-621,-1-8-1312,0-8-4002,1-10 6607,5-10 0,3-8 0,2-5 0</inkml:trace>
+  <inkml:trace contextRef="#ctx0" brushRef="#br0" timeOffset="-185748.73">1400 12643 10612,'-6'0'7236,"2"-1"-2861,4 1-3977,-19-53 84,55 20-362,-26-2 0,2 1-75,16 18 0,6 5 95,27-6-17,-14 10-45,-12 7 1,0 3 5,19 13-34,-7 6 85,-18 22 10,-19 6-426,-7-15 1,-2 2 324,-4 2 1,-3 1-11,-2 0 0,-1 0-20,-1 0 0,0-2-159,0-3 1,1 0 99,-4 26-179,5-11-1506,6-8-1933,6-17-455,2-9 4118,3-12 0,-5-4 0,0 0 0</inkml:trace>
+  <inkml:trace contextRef="#ctx0" brushRef="#br0" timeOffset="-185522.73">1429 12853 11323,'-8'2'9544,"2"0"-8126,6-2-360,0 0-380,2-8-549,20-3-43,17-10 1,8-3-73,1 3 0,1 0-407,-10 4 1,2-1 0,-1 1 218,17-8 0,-2 0-4742,-5 4 1,-3 1 3918,-10 4 1,-2 0 0,-2 2 0,-7 3 0,-17 8 0</inkml:trace>
+  <inkml:trace contextRef="#ctx0" brushRef="#br0" timeOffset="-36.48">14564 7017 24575,'0'0'0</inkml:trace>
+</inkml:ink>
+</file>
+
+<file path=ppt/ink/ink3.xml><?xml version="1.0" encoding="utf-8"?>
+<inkml:ink xmlns:inkml="http://www.w3.org/2003/InkML">
+  <inkml:definitions>
+    <inkml:context xml:id="ctx0">
+      <inkml:inkSource xml:id="inkSrc0">
+        <inkml:traceFormat>
+          <inkml:channel name="X" type="integer" min="-2.14748E9" max="2.14748E9" units="cm"/>
+          <inkml:channel name="Y" type="integer" min="-2.14748E9" max="2.14748E9" units="cm"/>
+          <inkml:channel name="F" type="integer" max="32767" units="dev"/>
+        </inkml:traceFormat>
+        <inkml:channelProperties>
+          <inkml:channelProperty channel="X" name="resolution" value="1000" units="1/cm"/>
+          <inkml:channelProperty channel="Y" name="resolution" value="1000" units="1/cm"/>
+          <inkml:channelProperty channel="F" name="resolution" value="0" units="1/dev"/>
+        </inkml:channelProperties>
+      </inkml:inkSource>
+      <inkml:timestamp xml:id="ts0" timeString="2026-03-20T13:32:08.589"/>
+    </inkml:context>
+    <inkml:brush xml:id="br0">
+      <inkml:brushProperty name="width" value="0.05292" units="cm"/>
+      <inkml:brushProperty name="height" value="0.05292" units="cm"/>
+      <inkml:brushProperty name="color" value="#FF0000"/>
+    </inkml:brush>
+  </inkml:definitions>
+  <inkml:trace contextRef="#ctx0" brushRef="#br0">11303 6934 19546,'-3'-7'1408,"0"-27"1,3-5-826,2 15-119,-2-17 1,2 3-17,3 25-296,-1 3 94,1 19 68,-2 17-68,0 26-159,-2-18 0,-1 3-185,-1 2 1,0 1 125,0-2 0,1-2 22,10 22 28,14-21 68,21-22 39,17-25-110,-22-5 1,2-6-752,7-8 1,1-6 712,-11 8 0,0-2 1,1-1-525,2-2 0,2-1 0,0 0 515,2-1 0,0-1 0,0 1-13,-1 1 0,1 1 0,-1 0-291,-4 3 1,0 0 0,-1 2 269,12-8 1,-4 3-93,-10 8 1,-3 4-647,12-4-1134,-20 21 1878,-15 24 0,-7-9 0,-5 8 0</inkml:trace>
+</inkml:ink>
+</file>
+
+<file path=ppt/ink/ink4.xml><?xml version="1.0" encoding="utf-8"?>
+<inkml:ink xmlns:inkml="http://www.w3.org/2003/InkML">
+  <inkml:definitions>
+    <inkml:context xml:id="ctx0">
+      <inkml:inkSource xml:id="inkSrc0">
+        <inkml:traceFormat>
+          <inkml:channel name="X" type="integer" min="-2.14748E9" max="2.14748E9" units="cm"/>
+          <inkml:channel name="Y" type="integer" min="-2.14748E9" max="2.14748E9" units="cm"/>
+          <inkml:channel name="F" type="integer" max="32767" units="dev"/>
+        </inkml:traceFormat>
+        <inkml:channelProperties>
+          <inkml:channelProperty channel="X" name="resolution" value="1000" units="1/cm"/>
+          <inkml:channelProperty channel="Y" name="resolution" value="1000" units="1/cm"/>
+          <inkml:channelProperty channel="F" name="resolution" value="0" units="1/dev"/>
+        </inkml:channelProperties>
+      </inkml:inkSource>
+      <inkml:timestamp xml:id="ts0" timeString="2026-03-21T13:32:35.958"/>
+    </inkml:context>
+    <inkml:brush xml:id="br0">
+      <inkml:brushProperty name="width" value="0.05292" units="cm"/>
+      <inkml:brushProperty name="height" value="0.05292" units="cm"/>
+      <inkml:brushProperty name="color" value="#FF0000"/>
+    </inkml:brush>
+  </inkml:definitions>
+  <inkml:trace contextRef="#ctx0" brushRef="#br0">1922 2210 20021,'53'21'-821,"-11"-11"1,2-3 857,-11-6 0,1-2-718,23 1 1,2-1 1025,-13 0 0,2 1-27,-7-1 1,3 1 0,1-1-374,3 1 1,2-1 0,0 1 176,3 0 1,1 0 0,1 0-526,4 0 0,0 0 1,1 0 545,-13 0 1,1 0 0,1 0-1,0 0-57,3 0 0,0 0 1,1 0-1,1 0-484,4-1 1,2 0-1,-1 0 1,-1 0 468,-9 1 1,-2-1 0,1 0 0,5 0-12,0 0 1,6-1 0,3-1 0,0 1 0,-3 0 0,-5 0-77,-3 0 1,-6 0 0,1 0 0,8 0-8,-3 0 0,6 0 0,5 0 0,2-1 0,2 1 0,-2-1 0,-3 1 0,-4-1-154,8 1 1,-4-1 0,-2 1 0,1-1 0,6 1 240,-13 0 0,4-1 1,2 1-1,0 0 1,1-1-1,0 1 1,-1-1-1,-2 1-127,1 0 0,-2-1 1,0 1-1,0 0 1,-1 0-1,1-1 1,0 1 111,1 0 1,1-1 0,-1 1-1,1 0 1,0-1 0,-1 1 0,1-1-50,1 1 1,-1 0 0,1-1-1,0 1 1,-1 0 0,1-1-1,0 1 20,1-1 1,0 0 0,1 1-1,-1-1 1,0 0 0,-1 0 0,-2 1-11,-1-1 1,-3 1-1,0 0 1,0-1 0,2 1-1,3-1 67,0 0 1,4 0-1,2 0 1,1-1 0,0 1-1,0-1 1,-2 1-1,-3 0-21,4 0 0,-3 0 1,-2 0-1,1 0 1,1 0-1,4 0-68,-8 0 1,3 0-1,3 0 1,0 0-1,1 0 1,0 0-1,-2 0 1,-2 1-1,-4-1 1,8 0 1,-3 1-1,-3-1 1,-1 1 0,2-1-1,3 1 43,-9 0 1,2 0 0,1 0 0,0 0 0,1 0-1,0 1 1,0-1 0,0 1 21,3-1 0,0 1 0,0 0 1,1 0-1,-1 0 0,1 0 1,1 0-1,-1 0 2,-5 0 0,0 0 0,0 0 1,0 0-1,1 0 0,0 1 0,0-1 1,1 0-1,1 1-8,-1-1 0,1 0 0,1 1 0,0-1 0,1 1 0,0-1 0,-1 1 0,-1-1 0,0 1 1,-2 0-32,6 0 1,-2-1 0,-1 1 0,0 0 0,-1 0 0,0 0 0,0 0 0,1 0 4,0 0 1,-1 0-1,1 0 1,-1 0-1,0 0 1,0 0 0,1-1-1,-1 1 21,-1 1 1,0-1-1,0 0 1,0 0-1,0 0 1,0 0-1,0 1 1,-1-1 27,0 0 1,1 0 0,-1 0 0,0 0 0,-1 0 0,1 0 0,0 0 0,0 1-37,-1-1 0,0 0 1,-1 0-1,1 0 0,0 0 1,0 1-1,-1-1 0,1 0-21,0 0 1,-1 0 0,1 0 0,0 0 0,-1 0 0,1 0 0,0 0 0,-1 0-15,9 0 1,-1 0 0,0 0 0,1 0 0,-1 0 0,1 0-1,-1 0 1,-7 0 0,0 0 0,0 0 0,0 0 0,0 0 1,0 0-1,0 0 0,0 0 17,0 0 1,0 0 0,0 0-1,0 0 1,0 0 0,0 0-1,0 0 1,0 0 31,1 0 1,-1 0 0,0 0 0,0 0 0,0 0 0,0 0 0,0 0 0,0 0 537,0 0 1,0 0-1,0 0 1,0 0 0,0 0-1,-1 0 1,1 0 0,0 0-1117,7 1 1,0-1-1,0 0 1,0 0-1,0 0 1,-1 0-1,1 1 593,-1-1 0,0 0 0,0 1 0,0-1 1,0 1-1,0 0 0,0-1-6,-1 1 1,0 0 0,1 0-1,-1 0 1,-1 0 0,-1 0-1,-1 0 6,-3 0 1,-2 0-1,-1 1 1,0-1 0,2 0-1,3 0-18,-2 1 0,2-1 0,3 1 1,1 0-1,-1-1 0,0 1 1,-3-1-1,-2 1 9,1-1 0,-4 0 1,-1 0-1,0 0 0,2 1 1,2-1-45,-1 0 1,3 0 0,1 1 0,2-1 0,0 0 0,-1 1 0,-2-1 0,-1 0 15,6 0 0,-2 0 0,0 0 0,-2-1 0,1 1 0,0 0-2,-1-1 0,1 1 0,0 0 1,-1 0-1,1-1 0,-1 1-18,0 0 1,0-1 0,0 1 0,0 0 0,-1-1-1,1 1-1,0 0 1,0 0 0,0 0 0,0 0 0,0 0 0,0 0 1,0 0 1,0 0 0,0 1 0,0-1 0,0 0 0,0 1-6,-1 0 0,0-1 0,0 1 0,0 0 0,-1-1 0,1 1 14,-2 0 1,1 0 0,-1-1 0,0 1 0,0 0 0,0 0 21,8 0 1,1 0 0,-1 0 0,-1-1 0,1 1-116,-2 0 0,-1 0 0,1-1 0,-1 1 0,0-1 70,-1 0 0,0 0 0,0 0 0,-1-1 0,-3 1 1040,2 0 0,-4 0 0,1 0 0,4-1-1078,-7 1 0,3-1 0,2 0 1,0 0-1,-2 0 0,-3 1-69,7-1 1,-4 0-1,0 1 1,4-1-103,-7 0 0,3 0 1,2 0-1,0 0 1,-1 1-1,-3-1-734,2 0 0,-2 0 0,-1 0 0,-1 0 1,-1 0 1008,6 0 0,-1 1 1,-2-1-1,-4 0 0,20 0 1,-9 0-1,-24 0 0,-1 1 1</inkml:trace>
+  <inkml:trace contextRef="#ctx0" brushRef="#br0" timeOffset="1666">2932 3780 25741,'-11'-25'-6277,"14"12"7362,17 25-1703,7 3 231,13 4 401,-9-8 1,1 0 141,22 7-363,-9-5 0,5 0 24,4-4 1,0 0 222,-9-2 0,3 0-1,1-1 0,4 0 0,-2-1-199,9-1 1,1-1 449,-9 0 0,3-1 0,3 0-622,-4-1 1,3 0-1,1 0 1,0-1 485,-5 0 0,-1 0 0,1 0 1,4-1-50,-4 1 0,2-1 0,3 0 0,0-1 0,0 1 0,-3 0-301,2-1 0,-1 0 1,-1 0-1,-1 0 0,1 0 239,1 0 1,1-1-1,-1 1 1,0 0-1,-3 0 0,3-1 0,-3 0 1,0 1-1,1-1-16,2 0 1,-1 0 0,3 0-1,2 0-199,-8 1 1,3-1 0,1-1 0,1 1 0,-1 0 0,-2 0 170,2 0 1,-2 0 0,-1-1-1,2 1 1,3 0 3,-4-1 1,3 1 0,2 0 0,1-1 0,-1 0 0,-2 1 0,-3-1-75,3 0 0,-3 1 1,-2-1-1,2 0 1,4 0 86,1 0 1,3-1-1,4 1 1,0 0 0,0-1-1,-3 1 1,-3 0-90,3-1 1,-4 1-1,-2 0 1,3-1 0,5 1 84,-13 0 0,3 0 1,4 0-1,1-1 1,1 1-1,0 0 1,-2 0-1,-3 0 1,-4 0-8,15-1 1,-4 0 0,-3 1-1,1-1 1,2 0-44,-2 1 1,1-1 0,1 0 0,1 1 0,0-1 0,-2 0 2,-1 1 1,-1-1 0,0 1 0,1-1 0,-1 1 0,1-1 30,-5 1 0,-1 0 1,1 1-1,1-1 0,-1 0 1,1 0-1,0 1-14,1-1 1,1 0-1,0 0 1,0 0-1,1 0 1,0 1-1,1-1 0,-1 0 0,0 0 1,2 0-1,0 1 1,0-1-1,-1 0 1,0 1-1,-3-1-46,1 1 1,0 0 0,-2 0 0,0 0 0,-1 0-1,-1 0 1,-2 0 63,11 0 1,-3 0 0,-2 0-1,2-1 1,1 1 8,-3 0 1,2 0 0,0 1 0,1-1 0,0 0-1,0 0-30,1 0 0,0 0 0,1 0 0,-1 1 0,-1-1 0,-1 0 22,3 0 1,-3 0-1,-1 1 1,2-1 0,4 0-42,-8 0 1,3 1-1,2-1 1,1 0-1,-2 0 1,-1 1-1,-5-1-17,3 1 1,-4 0 0,-2 0 0,1 0 0,3 0-13,-1 0 1,2 0 0,2-1 0,0 1-1,0 0 1,-1 0 29,0 0 1,-1 0 0,0 0 0,1 0 0,-1 0 0,0 0 0,0 1 0,0-1 0,0 0 0,0 1 0,0-1 0,0 1-4,-1-1 0,0 1 0,-1-1 0,1 1 0,1 0 1,1-1-2,-2 1 1,1 0 0,2 0-1,-1 0 1,1 1 0,-2-1 0,-1 0-8,2 0 1,-1 0-1,-1 0 1,0 0-1,-1 1 1,0-1 0,-2 0 0,0 1 0,-1-1 0,0 1 0,-1-1 1,0 1 40,6-1 1,-2 1 0,0 0 0,0-1 0,0 1-36,1 0 1,-1-1-1,1 1 1,0 0-1,0 0 8,1-1 1,0 1 0,1 0-1,1-1 1,0 1-27,-5-1 1,2 1-1,0-1 1,-1 0-1,-1 1 1,-5-1-29,5 1 0,-6-1 1,1 1-1,3-1 59,6 1 1,4-1 0,1 0 0,-2 1 0,-7 0-48,0-1 0,-6 1 1,4 0-11,4 0 0,4 0 1,2-1-1,-2 1 54,-1 0 1,-1 0-1,0 0 1,1 0-34,-8 0 1,0 0 0,1 0 0,1 0-1,1 0-9,7 0 1,1 1-1,1-1 1,0 0-1,-1 0 25,-2 1 1,1-1-1,-1 1 1,-2-1-1,-5 1 58,11-1 0,-5 1 0,-1 0-124,-4 0 0,0-1 1,1 1 21,-6 0 1,2-1 0,0 0 0,1 1-8,3-1 0,0 0 0,1 0 0,0 0 21,-1 1 0,-1-1 1,2 0-1,2 0 43,0 0 1,4-1 0,1 0 0,-4 1 0,-7-1 77,-5 0 1,-7 1 0,5-1-104,2 0 0,4 0 0,3-1 0,0 1 0,-2-1 7,5 0 1,-1 1 0,-1-1 0,2 0-13,2 0 1,0 0 0,1 0-1,-1 1-2,-3-1 1,0 0 0,0 0 0,1 1-45,-6 0 0,3 0 0,0 0 0,-3 0 0,-5 1-54,0-1 0,-5 1 1,5-1-218,0 1 1,5-1 0,2 1 0,0 0-1,-5 0 383,15 1 0,-3 0 1,-5 1-1,8-2 1,-3 1-1,-8 0 1,1 1-1</inkml:trace>
+  <inkml:trace contextRef="#ctx0" brushRef="#br0" timeOffset="2274">23916 2092 17922,'-5'-3'246,"1"2"304,4 1 755,84-5-2356,-47 5 0,3-1 1200,0 0 1,4-1 0,3 1 196,9 1 0,4 1 1,-2 0-168,-10 0 1,-1 0 0,3 0-85,3 0 1,3 0-1,2 1 1,-1-1-319,-5 0 1,0 1 0,-1-1 0,1 1 257,2-1 0,1 1 0,-1 0 0,1-1-462,1 1 1,0-1 0,0 0-1,0 1-123,1-1 0,-1 1 0,0-1 1,-2 1 666,10-1 1,-1 0 0,-6 1-1,3-1 1,-8 0 0,8 1 0</inkml:trace>
+  <inkml:trace contextRef="#ctx0" brushRef="#br0" timeOffset="2856">21897 3227 14926,'54'-3'261,"-17"1"1,2 0-259,1 0 0,5 0-1058,-1 0 0,6 1 1,3-1-1,-2 0 1063,11-1 1,-1 0 0,5 0-369,-9 1 0,4-1 0,3 1 0,1-1 0,-2 1 334,-10 0 1,-1-1 0,1 1 0,0 0 0,0 0 0,1-1-131,4 1 0,0 0 0,1 0 0,0-1 0,1 1 0,0 0 118,1 0 0,2 0 0,-1-1 0,1 1 1,0 0-1,0 0-215,0 0 1,0 1 0,0-1 0,0 0 0,0 0 0,-1 1 59,-1-1 0,1 1 0,-1 0 0,0-1 0,-1 1 0,0 0-631,-1 0 0,-1-1 0,1 1 0,-2 0 0,0 0 0,-3 0 797,4 0 0,-2-1 0,-1 1 0,-2 0 0,-4 0 0,10 0 0,-5 0 0,-6 0 0,-6-1 0,-1 1 0</inkml:trace>
+  <inkml:trace contextRef="#ctx0" brushRef="#br0" timeOffset="4399">8314 3737 12404,'6'-11'2386,"-2"3"-825,-4 8 288,0 0-950,15 38-1266,-17 10 335,8-10 0,-2 2-247,-6 0 1,-3-1 409,2-2 0,1 1-123,0 2 1,1 1-147,0 3 1,1 1-101,0 2 1,1 2 22,1-5 0,0 2 1,1-2 270,-2 2 1,2 2-155,1 6 0,1 6 1,-1-2-638,0-7 0,-1-1 0,0 2 619,0-6 0,0 3 1,0-1-1,-1 0-40,1 6 1,0-1-1,-1 4 79,-1-7 1,0 4 0,-1 2 0,0-1-1,1-4-589,-1 10 1,0-3-1,0 6 654,0-10 1,-1 6-1,0 3 1,0 0-1,0-1 1,-1-5-434,1 7 1,-1-3-1,1-2 1,-1 0 468,0 1 0,0-2 0,0 2 1,-1 1 25,1-3 0,0 1 1,-1 2-1,1-2 1,0-3-40,-1 1 1,1-4-1,0 1 1,0 1-40,0-4 1,0 1 0,-1 1 0,1 2 0,-1 0-198,0 0 1,0 2 0,-1 0 0,0 1-1,1-2 1,-1-2 179,0-1 0,0-2 0,0-2 0,-1 2 0,1 1-103,-1 8 0,0 1 1,0 2-1,0 0 0,-1 0 101,1-1 1,-2 0-1,1 0 1,0 0-1,-1 1-53,2-6 1,-1 0 0,1 0 0,-1 1 0,1 0 0,-1 0 88,0 2 0,1 0 0,-1 0 0,1 1 0,-1 0 0,1 1 10,0-2 0,0 0 1,0 2-1,0 0 1,0-1-1,0-1 1,1-1 16,0 1 1,1-1 0,-1-2 0,1 0-1,0 0 1,0 1-4,0 0 0,1 0 0,-1 0 0,1 0 0,-1 1 0,1-1 7,0 1 0,0 0 0,0 0 0,0 1 1,0-1-1,0 1 8,0 0 0,0 1 0,0 0 0,0-1 0,0 1 1,0 0 0,0 1 1,0-1 0,0 1 0,-1 0 0,1 0 0,0 0 21,-1 0 0,0 1 1,0-1-1,0 1 1,-1 0-1,1-1 18,0-1 0,0-1 0,-1 0 0,1 1 1,-1 3-1,0 6 34,1-15 1,-1 5 0,0 3 0,0 2 0,0 2 0,0 1 0,0-1 0,0-1-1,1-2 1,-1-2 0,1-4-72,0 2 1,0-4 0,0-2 0,1-1 0,0 0 0,-1 1 0,1 2 0,-1 4-16,0-3 1,0 4 0,0 2 0,0 2 0,0 1 0,0 0 0,1-1 0,-1-1 0,1-3 0,0-3-1,1-4 11,0 11 0,0-5 0,1-3 0,0-2 0,1 0 0,0 2-15,-1 0 1,1 0 0,1 0-1,-1 0 1,1 0 0,-1-1-14,1 1 0,0 0 1,0 1-1,1-2 1,-1-1-1,1-1-7,0-1 0,-1-2 1,1-1-1,1 1 1,-1 1-49,1 7 0,1 1 0,0 1 0,0 1 0,0-2-678,0 1 1,1 0-1,-1 0 1,1-1-1,-1-1 733,0-5 0,0 0 0,0-1 0,0-1 0,-1-1 0,2 7 0,-1 0 0,0-4 0,-1-9 0,0-6 0,-1 0 0</inkml:trace>
+  <inkml:trace contextRef="#ctx0" brushRef="#br0" timeOffset="5708">23456 3330 7074,'3'-6'2781,"0"2"-919,-3 4-654,0 0-540,11-64 530,-3 33-818,0-7 0,1 1 309,2 14-245,-3 11-197,-2 4 279,-3 5 36,0 4-47,0 14-473,-1-2 46,0 34-45,-6-3-6,0-9 0,-2 2-266,-4 19 15,-1-5 1,0 2-501,3-12 1,0 1 576,0-1 1,0 3-1,0-1-467,-2 14 1,1 1 632,3-17 1,-1 2 0,1-1-2,-1 4 1,1 1 0,0-1-7,-2 10 0,0 4 4,3-14 0,-1 6 1,0-1-1,2-5-18,-1 8 1,0 1 7,1-9 0,-1 7 0,0 4 0,1-2 1,0-4 24,0 8 1,1-3 0,0 1-383,0-7 1,0 1 0,0 1 0,0 2 419,1-4 0,-1 3 0,2 0 0,-1-1 0,0-2-521,1 14 0,0-3 0,1 4 461,-1-13 0,1 4 0,-1 2 0,1-1 0,-1-2-257,2 5 0,0-2 0,0-1 1,0 1 245,0 1 1,0 1-1,0-2 1,0-1-23,1 4 0,-1-3 1,1 5 5,-1-10 0,0 4 1,-1 2-1,1-1 1,0-3-14,-1-3 1,0-3-1,1 1 1,-1 3-8,0 5 0,1 3 0,-1 2 0,0 0 0,0-3-220,0 5 1,0-2 0,0-1 0,0 1 243,0-12 1,0 0 0,-1 0-1,1 0 1,-1 0 3,1 0 0,-1 2 0,1-1 0,-1-1 0,0-2 12,0 2 1,0-2-1,0 0 1,-1 2-1,0 8 1,0 2 0,-1 0 0,0 1 9,-1-11 0,0 0 1,0 0-1,-1 1 1,0 0-3,0 1 0,0 0 1,0 1-1,-1 0 1,0 2-7,-1 5 0,-1 2 0,0 0 1,0 0-1,-1-3-4,-1 4 0,0-2 1,0-1-1,-1 1-2,0 0 0,0-1 0,0 1 0,0-1-130,0 0 1,0 0-1,0-1 1,1 1 138,0-2 0,0 0 0,0 1 0,2 1-9,0-4 0,2 3 0,-1-1 0,1 0 1,1-5-5,0-3 0,1-3 1,0-1-1,1 4-16,0 1 0,1 4 1,0 1-1,0-2 1,2-4-16,1 11 1,2-4 0,0 0 2,-1-1 1,-1 1 0,2 3 1,-1-12 1,1 3 0,0 1 0,0 0 0,-1-2-57,0 6 0,-1-1 1,0 0-1,0 0 51,1 0 0,0 1 0,-1-1 0,-1 1 2,0 4 0,-2 1 1,0-2-1,0-4-4,-1-1 0,-1-5 0,0 0 40,0 1 0,-1-1 0,1 3 36,-1 3 1,-1 5 0,0-1 0,1-7-37,0 6 0,0 1 22,1-13 0,0 8 0,-1 3 0,2-1 0,0-6 21,0 4 0,2-4 0,-1 3-9,0 3 0,0 4 0,1 0 0,0-5-21,0-5 0,1-3 1,0 3 35,1 1 0,0 3 0,0 1 0,0-4 7,1 0 1,0-4-1,0 1-39,0 9 0,0 2 0,-1 1 11,1-11 0,-1 1 1,0-1-1,-1-2 229,-1-2 0,0-2 0,-1 2-273,0 2 1,0 2 0,0 1 0,-2-3-84,-1 4 0,-2-2 0,0 0 6,-2 0 0,-1-1 0,-1 0-180,0-1 1,-1-1-1,-1 0-911,0-2 1,-1 0 0,0-2 1172,-4 12 0,2-5 0,4-17 0,3-4 0,-3 2 0</inkml:trace>
+  <inkml:trace contextRef="#ctx0" brushRef="#br0" timeOffset="6757">1132 3869 19428,'44'-3'422,"0"0"1,10-2 0,3-1-326,-8 1 0,2-1 1,3 0-1193,-5 1 0,1-1 0,2 1 1,1-1 1222,-5 0 0,2 1 0,1-1 1,1 0-1,1 0-374,7 0 1,1-1 0,1 1 0,1-1 0,0 1 277,-6 0 0,1 1 0,1-1 0,0 0 0,1 0 0,0 1-153,-6 0 1,0 0-1,2 1 1,-1-1 0,0 1-1,-2-1 1,-1 1 107,10-1 1,-3 0-1,0 1 1,0-1 0,4 1-745,-5 0 0,4-1 0,1 1 0,1 0 0,-1-1 0,-4 1 1,-5 1 763,6-2 1,-5 2 0,-1-1 0,1 0 0,9 0 0,3-1-1,-4 1 1,-10 0 0,-11 1 0,0 0 0</inkml:trace>
+  <inkml:trace contextRef="#ctx0" brushRef="#br0" timeOffset="7880">1463 4805 14639,'-46'1'239,"0"0"0,0 3 0,4 9-121,12 16 0,3 6-48,-2-1 0,2 2-56,0 5 0,3-1-37,-4 14-1,17-21 1,8-1 99,18 0-33,19 2 17,23-12-6,-21-15 0,3-3-221,5-5 0,1-3 266,4-3 0,0-3-521,0-5 0,-1-2 567,-2-3 1,-1-2-13,-5-1 1,-2-1-136,-5-1 1,-4-1 280,-4 2 1,-4 0 269,7-19-14,-13 8 252,-13 9-675,-10 7 838,-6 8-1133,-6 6 599,-3 11-478,2 7 96,2 13-21,5 8-25,5 4 49,9 8 52,10-11-76,2-5-23,11-14-35,0-10 26,9-6 98,4-11 134,0-10 157,-3-10 39,-7-5 22,-11-2 241,-15-9-446,-5 16 11,-24-15-325,10 29 23,-21-10-79,8 18 27,-9 3-2,1 11-244,2 14 274,16 0-168,5 17-180,20-7-352,8 7-716,13-1-6647,23-1 8136,-9-12 0,-2-6 1,-22-11-1</inkml:trace>
+  <inkml:trace contextRef="#ctx0" brushRef="#br0" timeOffset="9457">2254 4924 13403,'0'-3'3628,"0"0"-1729,0 3-1582,-16-11-438,11 15 570,-11 4-124,15 24-281,1 11 107,0-9 0,-1 0-4,-1 15-66,-1 4-102,0-28 236,1-10-193,2-3 489,-1-3 311,2-7-623,4-13 53,-1-1 124,7-18 121,1-12-305,-2 5-28,-3 6 0,0 0-21,2-3-74,0-5 208,2 12-330,1 11 107,2 3 76,4 7-6,-4 8-177,16 17-98,-14-5-90,15 19 18,-15 4-19,-4 3-46,-5 6-28,-11-14 19,1-11 225,-2-7 482,4-10-67,0-5-213,3-12 1,3-10-63,1-2-3343,11-23 3365,-7 22-10,18-30-44,-15 34 21,21-20 75,-19 29-10,16-7 191,-7 16 3262,-4 3-3494,13 15-112,-15 8-349,7 15 50,-12-6-453,-1 22 18,-8-15-366,1 16-170,-4-18-647,3-10 843,1-12-979,10-8 576,9-19 1944,4-4 408,5-17 268,-8-2-364,-8 5 1114,0-14-1104,-10 23 1099,7-21-901,-7 25-546,0-1-427,-5 11-82,-1 5-1,1 6-155,2 6 60,1 2 145,6 24-14,-3-2-63,1 8 147,-6-8 0,-2 0-88,-1-1 87,-4 30 255,-3-34-11,-1 1-14,2-10 486,3-9 141,3-7-335,1-11-313,2-10-67,3-13-69,0 0 2,5-24-53,-3 14-20,4-18 0,0 15 19,3 5 27,3 8 41,5 7 85,-4 11 23,17 3-100,-10 10-69,13 7-206,-9 8-63,-5 12-68,-7 7-63,-10 6-51,-6 4-30,-6-2 159,-2-4 87,-1-10 226,3-10 171,1-10 102,5-10-65,0-4-18,8-23-78,1-3-58,5-19-43,-2 5-14,1 2 5,2 7-2,2 7-28,-2 9 33,13 3 51,-6 12-62,12-1-12,-6 13-48,0 6-32,-2 8-55,0 5-62,-4 2-48,-4-3-62,-6-3 22,-5-4 19,-3-6 42,-2-3 45,0-5 157,3-1 88,4-8 144,5-4 20,5-9-28,1-6-8,-2-4-12,-4-1 24,-3 2-80,-6 7-165,-3 2-207,-3 12-79,-2 0-93,1 6 183,-2 16 8,2 2 23,-1 9 60,6 12 135,2-10-33,6 11 33,4-12 6,2-5 16,1-7 7,2-6 27,2-6-6,1-10-33,1-6-5,0-8-12,-2-5-17,-4 0 6,-7 1 0,-6 1-33,-4 2-102,-6 4-436,0 4-1664,-2 4-2733,2 6 4968,1 1 0,2 3 0,0 0 0</inkml:trace>
+  <inkml:trace contextRef="#ctx0" brushRef="#br0" timeOffset="10064">4318 4763 15143,'0'-3'4851,"0"1"-2498,0 2-2398,6-23 90,-7 26-1,5-7 12,-8 37 6,2 10-6,0 3 6,2-1-34,0-5-17,1-7 22,-1-8 7,1-8 161,0-9 298,0-4-12,3-6-230,2-5-139,4-9-62,2-7-28,2-5-17,2-2-5,2 0-17,3 4-6,11 1-6,-9 9 1,11 5 39,-13 8-40,7 9 1,-4 5 5,-2 10 17,-3 3 23,0 4-29,-6-9 0,3 0 40,-6-13-6,3-1 0,2-6-28,3-8 17,3-6 28,2-9-17,-3-2 11,-1-3 11,-5 3 12,-3 4 27,-3 7-49,-4 6-80,-1 5 12,-2 4 12,1 4 4,4 12 7,0 5-18,0 3-27,0 5-152,0-4-358,3 6-924,2-1-2751,-2-3 4235,-1-7 0,-4-9 0,-3-6 0</inkml:trace>
+  <inkml:trace contextRef="#ctx0" brushRef="#br0" timeOffset="10248">4897 4605 8539,'1'-9'0,"1"2"0</inkml:trace>
+  <inkml:trace contextRef="#ctx0" brushRef="#br0" timeOffset="10997">5216 4454 23500,'-4'-20'62,"2"5"-2893,4 48 1,2 18 2819,0-3-6,1-12 1,1 4 90,0 8 1,1-2-271,0 7 284,-1-1 0,-1 1-1713,-2 5 970,0-12-600,0 0 409,-1-31 3535,2-3-2516,0-12 1357,1-10-930,-3-8 455,-8-12-612,-6 1-197,-4 1 303,-8 1-23,4 7 17,-3-7-419,9 8-113,5 3-95,16 6 33,1 4-21,21-3-63,18 1-3341,10-1 3426,2 2-392,-20 0 0,-1 1 403,1-1 14,-5 0 0,0-3 103,5-8 40,-4-1-34,-8 1 369,-14 5-284,-10 8 3092,0 0-3210,-3 5 1002,-3 8-1019,-2 9-34,-1 10-6,8 7 17,13 1-5,15-7 16,13-8 62,5-9 40,14-14-18,-8-13-17,-24 3 1,-1-2 56,7-13 170,-13 6 1,-2-2 226,1-7-11,3-9-61,-17 20-275,-5 8 117,-3 7-268,-1 5 0,-3 11-17,-1 2 11,-13 42-33,6-17-141,-1 5 1,-2 6 96,3-9 1,-1 1 0,0-1-568,-3 10 1,-2 4-116,2-3 0,-4 6 1,1 1-1,0-3 477,0 2 1,2-4 0,-1 0 0,1-3 0,0-1 0,2-3-1,0 2 1,-1 0 0</inkml:trace>
+  <inkml:trace contextRef="#ctx0" brushRef="#br0" timeOffset="13930">9026 4470 9899,'50'-8'326,"0"0"0,0 0 0,0 1 0,1 0 0,-3 1-304,11 1 0,-2 1-689,-12 0 1,0 1-1,2 0 665,2-1 0,1 0 0,1 0-432,4 0 1,1-1 0,1 0 463,2-1 0,1 0 0,3-1 4,-14 2 1,2 0 0,2-1 0,0 0 0,-2 0-409,9 0 1,-1-1 0,0 0 0,0 1 410,1-1 1,-1 0 0,1 1 0,0 0 77,1-1 0,0 1 0,0 0 0,-1 0-335,-7 1 0,-2 1 0,1-1 0,2 0 277,-1 1 0,2 0 0,1-1 0,0 1 1,0-1-32,0 1 1,0 0 0,0 1 0,0-1 0,3 0-15,-2 1 0,3 0 0,1 0 0,0 0 1,-2 0-1,-4 1-10,8-2 1,-5 1 0,0 1 0,4-1 2,-7 0 1,3 1 0,1 0-1,1-1 1,-2 1 0,-4 0-188,7-1 0,-4 1 0,-1-1 0,4 0 206,-2 0 1,2 1-1,2-1 1,0 0 0,-1 0 14,1 0 0,-1 0 0,0 0 0,2-1 1,2 1 8,-12 0 1,2 0 0,2 0 0,-1-1 0,1 1-1,-1 0 1,-1 0-91,3 0 1,-1 0 0,0-1 0,-1 1-1,0 0 1,0 0 62,-2 0 1,1 0-1,-1 0 1,0 0-1,-1 0 1,0 0 21,8 0 1,1-1 0,-2 1 0,0 0-1,-2-1 3,3 1 0,-3-1 1,1 1-1,2-1 32,-3 0 0,1 1 0,2-1 0,0 0 0,2 0-34,-5 0 1,1 0 0,1 0 0,1 0 0,-2 0-1,-1 0-53,4 0 1,-1 0-1,-1 0 1,-1 0-1,0 0 16,-2 0 1,0 0 0,-1 0 0,0 0 0,0 0 3,-3 0 0,0 0 1,0 0-1,-2 1 0,0-1-8,2 0 0,-1 0 1,-1 1-1,3-1 3,-3 0 1,3 1 0,0-1 0,0 1 0,0-1 71,-3 0 0,-1 1 0,0-1 0,1 1 0,1-1-69,4 0 0,2 0 0,0 0 0,-1 0 0,-1-1 3,2 1 1,-1 0-1,-2 0 1,0-1-8,-3 1 1,0 0 0,-2 0-1,-1 0 17,8 0 1,-1 0 0,-3 0 328,8 0 0,2 0-295,-4 1 0,5 0 0,-4 1-28,0-1 0,1 1 28,1 0 0,4 1 0,-5 1-23,-6-1 1,-3 1-16,-2 0 1,2 0 0,-4 0-2,-4 0 0,-1 1 731,10 0 1,0 0-746,-15 0 0,-3 0 5,3 1 1,-2-1 1354,16 2-1335,-24 1 678,-2 0-683,5 1 33,-1 2-39,-14-3 3358,1 0-3352,-14 0 82,0 0-66,0 4-28,0-1-5,0 5 0,-1-5 5,3 5 17,2 3-6,2 4-11,2 10 29,-2 3 27,-3 8-28,-2-5-5,-3 2 13,-1 0 1,0 3-20,-1 23-1719,0-11 1,1 2 1698,1-12 1,0-2-108,1 1 0,0 0 88,1-1 0,0-1 22,0-1 0,-1 0 17,-2-3 0,-2-1 11,-2-2 1,-3-1 66,-13 26-56,-2-17 6,-12 1-33,-7-5-34,6-7-34,-18 4-22,0-14 47,23-10 0,-2-1 17,1-1 1,-2-2-15,-15 0 0,1-2 17,-10-1 0,12 0 0,-7-1 0,2 0-155,-1 0 0,0-1 171,0 1 1,-3-1 0,3 0-237,-2 1 0,1-2 233,9 1 0,-2 0 0,0-1 443,-5 1 1,0-1 0,-1 1-461,-3-1 0,0 1 1,-2-1-332,9 1 1,-3 0 0,1-1 0,1 1 309,-8 0 1,1 0 0,2 0 7,10 0 0,1 1 1,-2-1-32,-5 1 1,-4 0-1,1 0 1,5 1 19,-7 0 0,0 0 1,6-1 0,-5 1 1,-2 0-1,1 0-35,-9 1 1,2-1-1,-2 0 37,13 0 0,0 0 0,-1 0 0,-1 0-260,-7 0 0,-3 0 0,1 0 0,1-1 280,6 1 1,1-1 0,2 0 0,0 1 8,-4-1 0,1 0 0,-3 0 1,8 0 1,-3 0-1,-2 0 1,1 0 0,3 0-6,-14 1 0,3-1 0,-4 0-224,13 1 1,-5-1-1,0 1 1,-1-1-1,3 1 197,-4 0 1,0-1-1,2 1 1,2 0-6,-5 0 0,2 0 1,-4 1-62,11-1 0,-3 0 0,-2 1 0,2-1 0,2 0 9,3 1 0,2-1 0,1 0 0,-2 1 49,-7 0 0,-1 0 0,-2 0 0,0 1-14,6-1 1,-2 0 0,0 0 0,1 1 0,4-1 27,-14 2 1,3 0-1,-3 0 20,12-1 0,-4 0 0,-2 0 0,2 1 0,1-1 9,-4 1 0,2 0 1,1 0-1,2 0-1,-5 0 1,2 1 0,-3-1 4,9 0 0,-3 0 1,-1 0-1,0 1 0,4-1 5,-12 1 0,4-1 0,-5 1-11,13-1 1,-4 1 0,-2-1 0,2 0-1,2 0-5,-3 0 1,3 0-1,1 0 1,-1 0-184,1-1 1,1 1 0,0-1 0,0 1 176,2-1 1,0 0 0,0 0 0,1-1-6,-14 3 1,2-1 0,-1 0 52,2-1 1,1 1-1,0 0-49,1-1 1,0 1-1,2 0 2,12-2 1,1 0-1,-2 1 24,-18 0 1,-3 1 0,3 0 7,18-2 0,3-1 0,-5 1 4,-12 0 0,-8 1 0,-1 0 0,7-1-14,4-1 1,4 1 0,-2-1-12,5 0 0,-3 0 0,1 0 0,3 0-4,-17 1 0,6-1 355,13 0 1,0-1-357,-13 2 1,0-1 2,20-1 1,0 1-3,-15-1 0,0 1-6,13-1 0,0-1 11,2 1 1,-1-1 13,2 0 1,0 0 8,0 0 0,1 0 713,3-1 0,1-1-655,-28-2-33,10-5 2601,7-1-2657,4-1 1565,6 0-1576,1 1 486,3 0-480,-1 0 267,-1-2-178,-1 0 68,-2-4 38,0-4 73,-2-7 23,-1-7-152,7 3 107,-7-16-118,18 19 0,0-2-427,0-3 0,0-1 326,0-8 1,1 0-6,6 4 0,3 0-1,2-2 1,2 0 5,4-2 1,3-1 8,4 0 0,4 0-20,3-1 0,4 2-59,4 1 1,3 2-264,0 3 0,3 3 311,2 3 0,0 4 0,2-4 0,-4 13 0</inkml:trace>
+  <inkml:trace contextRef="#ctx0" brushRef="#br0" timeOffset="15215">21041 4204 14846,'-16'-49'814,"1"0"0,0 5 0,5 12-942,9 25 133,1 13 230,2 14-33,-1 21-23,1 22-623,-2-12 1,-1 0 463,-1-14 0,0 0-9,-1 6 0,-1 1-128,-1-5 1,0-3 127,-2 19-11,3-16 0,1-2 118,4-3 447,7-11-217,3-25-118,2-15-57,-4-17-61,-6-15-56,-12-13-31,2 26 1,-1-2 530,-3-1 1,1-1-532,-2-7 0,2 1 285,-2-16-302,6 17 0,3 3-13,5 9-6,6-24-23,9 28-16,13-5-4,6 18 1,4 2-1087,11-3 1120,-10 9 0,0 2-14,-7 5 1,0 1-314,6-1 0,2 1 302,13 1 0,4 1-7,-7-1 0,2 1 0,0-1 18,-6 1 0,-1-1 1,2 0-5,9 0 1,1 1 0,-4-1 11,1-1 1,-2 0-11,10-1 0,-1 0-612,-14-1 1,0 0 641,9 0 1,0-2 8,-6 1 0,-1-1-388,1-1 0,-4 0 402,15-3 329,-28 3 1,-2 0-291,3-3 90,11-5-74,-19 5 646,-1-1-578,-20 6 1169,-1 1-1528,-5 2 1292,-1 0-1050,0 6 189,0 9-144,0 13-24,1 9-4,4 21-7,4-8-111,-1-19 0,2 0 156,12 23-33,-6-22 0,1 1-23,9 23 20,-11-19 0,-2 0 65,-4 14-1,-13 4-39,-5-22-11,-15 1-17,-10-4-5,-7-1-28,1-3 16,-8-8-22,0-6-1646,4-5 0,-2-2 1651,13-1 1,-1-1-14,-22 0 0,-3-1-339,16-2 0,-1 0 0,-1 0 322,-3-1 1,-2 0 0,-1-1-485,4 2 0,-3-1 0,1 0 0,3 0 458,1-1 1,3 1 0,-2 0-339,-10-1 1,-1 1-1,2 1 231,7 1 0,3 1 0,2-1 0,-7 0 0,3-1 0,9 3 0,-1-1 0</inkml:trace>
+  <inkml:trace contextRef="#ctx0" brushRef="#br0" timeOffset="17708">9810 6263 11333,'-40'-23'423,"0"1"0,1-1 0,-5 5 0,-1 3 1,3 9 135,-3 15 0,4 6-743,-2 0 1,2 3 611,0 5 1,1 2-86,6-1 1,0 2-71,-10 9 0,0 3-78,12-5 0,0 1 0,2-1-131,-1 2 0,3 1-27,-4 13 1,7 1-93,16-19 0,5 0-56,3 7 0,4 1 4,6-2 1,6-2 63,7-2 1,5-2 67,6-3 0,5-3 67,6-3 0,5-5 145,6-3 0,4-4-71,-16-5 0,2-3 0,0-2 21,1-2 1,2-2 0,0-2 54,7-6 1,2-3 0,-5 0-380,4-3 0,-4-2 347,-9-1 1,0-4 0,-6 0 61,-5-5 1,-5-2-271,6-9 0,-3-4-55,-6-1 1,-3-2-28,-5 1 0,-4-2 92,-4-6 0,-5 0-45,-4 12 0,-4 1-87,1 4 0,-5 2-54,-6 7 1,-7 3 95,-17 1 1,-6 4 115,4 4 1,-5 2-376,-5 5 0,-7 3 0,6 3 387,4 5 1,2 4-224,1 1-1,-4 3 1,5 2-840,1 4 1,3 2 1081,-3 3 0,3 0 0,1 0 0,29-13 0</inkml:trace>
+  <inkml:trace contextRef="#ctx0" brushRef="#br0" timeOffset="18408">10235 6630 8405,'-5'1'3837,"2"-1"-1229,3 0-2264,80-8-261,-47 4 1,2 1-701,11-2 0,7-1 1,-4 1 628,-4 0 1,0 0 20,4-1 1,4 0 0,-3 0 34,4-1 0,1-1 27,-4 1 0,4 0 0,0 0 127,0-1 0,0 0 0,-3 0-93,4 1 0,0-1-10,-3 1 1,3 0-1,-4 1-32,1 1 0,-1 0 33,-10 1 1,2 1 0,-2-1-107,16 1 0,-5 0-23,-13 1 1,-3 0-138,1 2 1,-3-1-90,-9 2-941,7 5-1524,-36 3 2700,-5 2 0,-3-4 0,3-2 0</inkml:trace>
+  <inkml:trace contextRef="#ctx0" brushRef="#br0" timeOffset="19941">20673 6214 19242,'-3'-33'-475,"0"-1"1,1-10 266,9 81 64,2 4 43,1 2 38,-2 13 29,-6-32 29,1 19-125,-3-30 379,0-2 58,0-7 337,0-3-351,0-6-245,0-8-15,0-18-24,0 4 1,0-19 12,0 9 45,-1-23-34,-1 11-3,-2-3-8,0 22-28,0 10-140,2 8-210,7 8 290,13 1 24,20 2 10,3 1 20,5 1 1,2 1-730,7 0 742,0 1 0,2-1-3,-20 0 1,2-1-1582,19 0 0,1 0 1577,-9-2 1,0-1-6,7-1 0,-1 0-253,-20 0 0,-1-1 256,8 0 0,2-1-23,-1-1 1,1 0 10,0 1 1,0-1 11,3-1 0,-3 0 3,6 0 28,-8-1 61,-22 4 357,-5 1-593,-9 2 3259,-6 1-2643,2 2 572,-1 1-865,4 5-14,2 7-72,-2-3 16,2 19-73,-6-7-65,1 17-372,-5 11 288,1-16 38,-2 17 22,-1-20 53,-2 9 49,-6-5 95,-1-9 61,-32 2 91,-11-15-554,22-6 1,-4-1 236,-8-5 0,-5-2 1,2-2-1037,-13-1 1,0-2 1035,12 2 0,-2 0 0,1-1-24,0-2 0,1-1 0,3 0-300,-7 0 0,1-1-877,10 3 0,-3 0 1,5 1 1164,-2-1 1,5 1 0,-17 1 0,41 2 0</inkml:trace>
+  <inkml:trace contextRef="#ctx0" brushRef="#br0" timeOffset="22497">9357 7466 13842,'55'-13'1636,"7"2"-1518,-28 7 0,1 1-801,4 0 0,2 1 631,3 0 1,1 0-401,4 0 0,1-1 417,4 1 1,2 0 17,5-2 0,2 0 8,-18 2 0,0-1 1,2 0-489,3-1 1,0 1-1,2 0 517,2-1 0,0 1 1,1 0 124,3 0 0,0 0 0,1 1 18,1-1 0,0 1 0,1 0-43,1 0 0,1 1 0,0-1-82,-16 1 1,1 1 0,0-1-1,0 1-64,1-1 1,0 1-1,0 0 1,0 1-10,0-1 1,0 1 0,1 0 0,-1 1-6,1-1 1,1 0 0,-1 1 0,1-1-499,0 1 1,1 0 0,1 0-1,-1-1 457,2 1 0,0-1 1,0 1-1,1-1-1,2 0 1,1 0 0,-1 0-1,2-1 18,1 1 1,1-1-1,0 0 1,1 0 26,-10-1 0,1 1 0,-1-1 0,1 1 1,0-1-237,3 0 1,0 0 0,0 0 0,1 0 0,0-1 305,2 1 1,0-1 0,1 0 0,0 0 0,0 0-162,2 0 0,0 0 0,1-1 1,0 1-1,-1 0 209,-8-1 1,-1 1 0,1 0-1,0 0 1,-1 0 0,1-1-70,0 1 1,1 0-1,-1-1 1,0 1-1,1 0 1,-1-1 29,1 1 0,-1 0 0,1-1 0,-1 1 0,1 0 0,-1-1-51,0 1 0,0 0 0,-1 0 0,1-1 0,-1 1 0,1 0 19,9-1 0,1 1 0,-1-1 0,0 1 0,0-1-6,-1 1 0,0 0 0,0-1 0,0 1 0,-1 0 0,1-1 1,-1 0-1,0 1 1,0-1-1,0 1 17,0 0 0,-1-1 1,1 1-1,0 0 1,0-1-34,0 1 0,0 0 1,0 0-1,0-1 1,0 1-4,0 0 0,1 1 0,-1-1 0,1 0 0,0 1 0,-1-1 0,1 0 0,-1 0 0,1 1 1,-1-1 14,1 1 0,-1-1 0,1 1 0,-1-1 0,0 1 5,0-1 1,-1 1-1,0 0 1,0-1 0,0 1 49,-1 0 0,0-1 1,0 1-1,-1 0 0,0 0-58,-1 0 1,-1 0 0,0 0 0,0 0 0,0 0 31,-2 1 1,0-1 0,0 0-1,0 1 1,-1-1-29,-1 0 0,0 1 0,0-1 0,0 0 1,-1 0 27,11 0 0,0 0 1,0 0-1,-1 0-28,0 0 0,-1 0 1,-1 0-1,1 0-6,-2-1 1,0 0 0,0 1 0,0-1 1,-2 0 0,0 1 0,0-1 0,0 0 42,-1 0 1,0 0 0,0 0-1,-1 0-42,-1-1 0,0 1 1,-1 0-1,1-1 8,-2 1 1,0-1 0,0 1 0,0-1-5,0 1 0,-1-1 1,0 1-1,0-1-34,-1 1 1,0-1 0,0 1 0,0-1 38,-1 1 0,0 0 0,0 0 0,-1-1 209,14 0 0,-1 0 0,0-1-163,-3 1 1,-1-1-1,0 0-32,-4 0 1,-2-1 0,0 0 18,-5 0 0,-1-1 1,-2 0 452,15-4 1,-4-1-395,-7 1 0,-4-1 783,-4 2 0,-3-1-796,25-6-45,-7 5-136,-4 2 339,-19 5 2388,-7 0-1928,-17 2 1717,-6 1-2190,-4 0 907,-6-2-675,-9 2 277,3 0-493,2 0-514,8 2 158,4 4-317,1 3 329,0 16-269,1-7 23,0 9-73,0-6-16,0 0 68,0 8-3486,0 6 3706,0-10 84,0 19 41,0-23 23,1 21-8,-1-21-30,-5 36 45,-1-18 8,1-6 0,-1 0 19,-3 5-13,-2 10 12,3-5-25,2-7 0,1 0 6,-2 15 4,1-4 1,0-1 3069,0-2-3089,0-2 1,-1 1 5,-2 14-1,2-13 1,-1 3-16,3-7 1,0-1 2,0 0 1,1-1 2,2 2 0,2-2 1,0-3 0,0 1-2,2 8 1,1 3 3,0 14 1,1-2-304,0-18 0,-1 1 306,0 3 1,0 4-1,0-4-464,-2-3 1,0-2 422,1 9 1,-1 1 23,0-3 1,-2-2-3,-1-7 1,0 2 16,-2 20 0,0 2 1,-1-7 0,1-1-12,0-2 0,0-1 8,1 0 0,2-2-241,0-9 0,0 0 256,1 9 0,0 3 6,0-5 1,0 2 0,0-3-13,1-3 1,-1 1-390,-1 0 1,0 4 0,-1-7 402,-1 13-5,-2-10 0,-1 1 53,1-8 1,0 0-57,-1 9 0,1 2 14,-1 7 0,1 0 317,1-8 1,1 0-366,1 6 1,0 0 22,1-10 0,1-1-144,0 1 1,0-1 137,0-9 0,0 0 3,-1 18 0,-1-2-5,1 4-1,-2 7 0,0 0-5,0-6-525,0-12 1,0 7 0,0-6 384,-2 10-194,-1 3 1,-2-3-126,-2-10 470,-6 6 0,-1-2 0,6-16 0,-12 26 0</inkml:trace>
+  <inkml:trace contextRef="#ctx0" brushRef="#br0" timeOffset="24618">9294 7521 17060,'-3'-5'-1135,"0"2"569,3 3 2393,-2 5-1190,3 5-692,-1 11 158,1 10-106,0 10-598,-1 10 1263,1 9-324,1-18 0,1 1-1540,2 18 1097,-1-15 1,1 0-1350,-1-15 1,-1 4 1708,-1 9 0,1 9 0,0 2 0,-1-5-273,0-6 0,-1-3 1,0 3-187,1 3 1,-1 4 0,1 0 0,-2-5 122,1 12 0,-2-5-5,1-8 1,0 2 40,1-1 0,-1 4 0,0-1-35,1 13 1,1 0-254,0-14 0,-1 1 0,2-1 352,1 14 0,1-3-28,-1-10 0,0 0-101,1 11 0,-1 0 106,-2-9 1,0-1-34,0-8 1,-1 1 0,0 1-14,-3 8 0,0 3 0,-1-2 316,0-7 1,0 0 0,-1 0-332,0-2 1,0 1-1,0-1 5,-1-2 0,0 1 1,0-1-508,2 2 1,-1 1 0,1-1 470,-1 9 1,0 3 19,1 1 1,1 5-1,0-5 69,1-5 0,0-2 6,0 12 0,0 0-12,0-3 0,0-1-8,-1-10 1,0 1 12,-1 9 0,0 4 10,-1-16 0,0 2 1,0-3-6,-2 14 1,-1-3 4,1-3 1,-1-1 2,0-5 0,0-1 31,0 0 1,1 0-26,-1 0 1,2 0-364,0 6 1,1-3 362,1 11-8,3-17 0,3-3 1724,0 2-1755,0-5 0,2 2-17,0-6 0,0-2-8,0 3 0,0 0 195,0 6 1,1-1-252,1 12-17,0 9 50,-1-13 53,1 12 510,-1-14-456,1-9 0,1 0-9,4 9 1500,-4-15 1,1 1-1631,5 17 72,-3-7-104,4 8-13,-1-2-11,1 1 14,-3-10 662,-1-5-579,2-5 67,0-13 56,8 3 17,3-10-51,-2-4 6,24-3-33,-5-4-12,-9 0 0,2 0 0,-2-1 0,0-1-3,1-1 1,1 0-143,2 0 0,-1 0 145,21-5-6,-9 3 1,-1 0 11,6 0-452,-12 2 1,6-1-1,-2 0 474,1 1 1,0 1-3,0-1 0,3 0 1,-3 0-5,4 0 1,-2 0 8,14-1 0,1 0-515,-10 1 0,1 1 503,2-1 0,5-1 0,-4 1 3,2 0 1,2 0 1,-10 1 0,6 0 0,1-1 0,-5 1-424,-3 1 1,-4-1-1,3 1 413,4 0 0,3-1 0,1 0 0,-4 1-2,-3 0 0,-3 0 1,4 0-2,7-1 0,6 0 0,-1 1 0,-6 0 3,-12 0 0,-4 1 1,6 0-369,9-1 1,8-1 0,4 1 0,-1-1-1,-7 1 362,-7 0 0,-4 1 1,-1 0-1,2-1 5,8 1 1,2-1 0,1 0 0,1 0-208,-4 0 1,3-1 0,0 1 0,-3 0 0,-5 1 203,0-1 1,-5 1-1,7-1 6,-3 0 0,9 0 0,4 0 1,0-1-1,-4 1 0,-8 0-18,2 0 0,-6 1 0,8-1 26,-7 0 0,9 0 0,4 0 1,5-1-1,0 0 0,-2 1 1,-3-1-1,-7 1-137,-1 0 1,-5 1 0,-2-1 0,2 1 0,5-1 134,-3 0 0,5 0 0,3 0 1,2-1-1,-1 1 0,-2-1 1,-3 1-1,-7 1 53,10-2 1,-8 1 0,-1 0-1,5 0-50,-3 0 1,4 0-1,1-1 1,1 1-1,-1 0 1,-4 0-7,9-1 1,-3 1-1,-1 0 1,3 0-5,-5 0 1,1-1 0,1 1 0,2 0-1,0 0-4,-4 0 1,2 1-1,1 0 1,0-1 0,-2 1-1,-3 0 1,8 0 1,-3 0-1,-1 0 1,3 0 1,-5 0 1,2 1 0,1-1-1,0 0 1,-2 1 1,-4 0 1,-1 0 0,0 0 0,0 0 0,0 1-145,1-1 0,-1 0 1,1 1-1,0-1 0,1 0 138,0 0 0,1 0 0,0 0 1,-1 0-1,0 0 49,10 0 0,0 0 0,0 0 0,-2-1-48,-4 0 0,0 0 0,-1 1 0,0-1-56,2 0 0,0 0 0,0 1 0,0-1 67,2 0 0,0 0 0,1-1 1,1 1-5,-8 1 0,2 0 0,1-1 0,-2 1 0,-1 0 92,3 0 0,-2 1 1,-1-1-1,-2 1-92,4-1 0,-2 1 0,3 0-3,-1 1 0,4-1 1,-1 1-1,-7 0-8,5 1 0,-2-1 7,-2 1 0,3-1 0,-1 1 182,0 3 1,-1 0 0,-3 0-213,2 1 1,-1 1 277,-5-2 1,3 1 0,-4 0-257,-2 2 1,-6 0 1702,5-1-1714,9 4 1,4 0 41,-20-4 1,0 0 503,26 5 0,0 0-521,-25-5 1,1-1-17,24 5 0,0-1 8,-30-4 1,0-1-23,14 2 0,5 1 0,-4-1 11,-9-3 1,-1 0 44,16 2 0,0-2 14,-14-4 0,-4 0 14,19-4 475,-18-3 0,-1-2-453,17-9-47,-14 4 0,1-1-6,-3 1 0,-1-1 11,2-1 1,-1 0 16,1-1 0,-2 0 9,19-11 134,-22 7 0,-3-1 1083,1-11-982,4-18-157,-23 4 302,-11-8-409,-3 25 1,0-1 8,-2-4 0,1-1 178,-1-2 0,1 1-55,1-2 0,2 0 70,4 0 0,4 0 11,1-1 1,4 0-82,3 0 1,1-1-52,1 0 1,-2 0-42,-2 3 0,-3 1 422,2-19-1360,-18 23 0,-6 2 865,-7 1 0,-6-4 0,11 25 0</inkml:trace>
+  <inkml:trace contextRef="#ctx0" brushRef="#br0" timeOffset="26647">9972 13784 15412,'-13'-34'-118,"5"20"124,11 58 16,1 13-22,1 6-23,-4-31 1,0-1-67,0 29-29,-3-8-11,-4-10 34,-3-11 106,-3-13 45,2-9-39,2-17 62,1-11 38,3-16-10,1-11 38,2-10 52,2-7-80,-1 30 1,0 0-3,1 1 0,0 0 92,-1-27 6,0 10 11,-2 10-51,0 12-324,0 12-62,5 7 196,8 6 12,3 1-6,31 4-12,-1 1 12,-11-1 0,3 1-250,-4-2 0,1 1 264,1-1 0,0 0 8,1-1 0,-1 0 3,1-2 0,-1 0-11,2-2 0,-1-1-6,2-2 0,1-1 0,0-1 1,1-1-1,2-1 0,0 1 8,-1-1 1,0 0 0,-1 1 0,-1 0 8,-4 2 0,-1-1-69,21-5 234,-17 3 319,-14 3 241,-12 2-167,-8 1-219,-2 1 369,-2 1-643,1 0-450,-1 1 466,2 30-83,1-14-1,2 24 18,2-12-29,-2-5 22,7 26-16,1-12-6,11 18-12,6-7 7,-3-11-13,-5-9 1,-1-1 12,4 6 10,4 16 7,-17-13 0,-16 1 10,-13 1 6,-16 0 11,-12-3 17,-10-4-28,26-18 0,-1-1-6,-2-3 1,0 0-6,-1-3 0,-3-1-1148,-11 0 0,-7-2 1,4 0 1127,5 1 0,-1-1-9,-11 1 1,-7 0 0,3 0-818,14-1 0,3 1 1,1-1 735,-12 1 0,0-1-269,10 1 0,-2-1 0,6-2-3251,-11-6 3613,5-1 0,28-1 0,16 3 0</inkml:trace>
+  <inkml:trace contextRef="#ctx0" brushRef="#br0" timeOffset="27265">10129 14056 16208,'4'-49'375,"1"16"-157,-1 48 12,2 8-6,7 4 123,11 6-39,3-7 342,23-2-185,-5-15-101,12-12-191,-24-6 1,1-3-521,-2-3 0,-1-1 366,0 0 1,0-1 22,2-4 0,-2 0-14,-5 2 0,0-1-167,7-6 0,2-1 139,4-5 0,1 0-42,-7 6 0,0 3-112,2-2 0,-2 3-255,4 1-3041,-5 10 3450,-15 7 0,-5 3 0,-6 1 0</inkml:trace>
+  <inkml:trace contextRef="#ctx0" brushRef="#br0" timeOffset="29407">13690 13675 9486,'-1'-9'3187,"0"2"-2352,1 7 1058,0 0-818,1-52-593,0 38 431,1-40-756,-2 52-740,0 0 544,0 7 28,0-4 22,0 4 0,0-5 1272,0 0-1283,-1-3 44,1 1 29,-1-2-27,1 1 379,0 3-408,2 8-6,-1 0 17,5 17-44,2 15 4,2 7-13,-4-15 0,-1 2-282,-2-3 1,-1 1 135,0 1 0,-1 1-149,0 0 1,-2 0-524,0-1 1,0-1-1964,0 15 2806,0-3 0,1-28 0,0-2 0</inkml:trace>
+  <inkml:trace contextRef="#ctx0" brushRef="#br0" timeOffset="30790">14072 13719 9514,'0'-5'6173,"0"2"-3110,0 3-2452,0-37-118,0 23-90,-3-28-106,1 31-73,-3 1-73,1 0-56,1 3-72,1 2-107,1 3-801,1 1 863,0 5 22,0 0-6,0 3 0,2 1-22,-1 0-39,1 1-101,0 2-151,0 1-118,1 1-157,-1 0-689,0-1-1764,2-2-2084,-1-2 1900,2-1 3231,1-3 0,-2-1 0,-1-2 846,-2 0 1310,-1-6-55,0 0-68,-3-5-168,0 1-173,-3-4-264,3 0-336,0-3 325,2-6-779,0 7-514,1 0-147,0 11-16,0 7 67,-2 10-3392,-3 21 3358,2-3-10,-1 24-212,3-11 10,5 14-454,4 1-1345,6-4 2017,5-4 0,-8-25 0,-1-7 0</inkml:trace>
+  <inkml:trace contextRef="#ctx0" brushRef="#br0" timeOffset="31240">13941 13548 13446,'23'-59'883,"0"1"0,1 0 1,1 9-319,4 20-184,13-7-191,-12 17 1,2 2-99,-3 3 1,1 3-4,28-9 9,-22 15 0,0 3 3,13 10-67,11 2 55,-30 8 1,-2 4 16,-1 5 14,-5 2 1,-2 3 97,-4 17-145,-9-19 1,-1 2 43,0 31-61,-5-27 0,-1-1-50,0 11-28,-1 12-163,0-27-6422,2 9 6607,2-15 0,-1-7 0,0-13 0</inkml:trace>
+  <inkml:trace contextRef="#ctx0" brushRef="#br0" timeOffset="32165">13653 13497 6971,'-1'-11'4431,"0"2"-3905,1 9 477,28-67 279,10 24-918,-7-4 0,1 2-514,-7 23 0,2 3 570,11-3 1,0 2-242,3 0-56,-3 3 1,2 0 66,19 2-156,0 3-40,3 10 23,-16 13 201,-13 3-195,12 21 16,-15-6-39,10 14 11,-14-7 109,-7-6-92,-6-4 16,-8-6 18,-2-8 342,-2-3-336,-1-6 223,-8 10-174,-1 2-61,-8 12-72,-7 17 10,8-9 34,-1 7-6,11-19-10,3-10-1,0-2 6,0-4-12,-1-1 6,-2 1-5,1-2 0,-1 0-23,-3 1 62,2-5-6,-5 1-28,4-2 34,-9-8-12,-1-1-5,-4-5 101,-12-8-6,10 7 6,-10-7 39,14 8 34,7 6-85,6 1-139,4 4-45,5-1 28,3 1 27,2 0-10,3 2 61,-2 2 40,-1 6-1,-1 5-16,0 7-6,2 3 45,4 1 67,8-4-73,0-7 213,31-3-106,-5-9-96,-11-1 1,0-3 117,26-6-79,-8-6-105,-15 3-18,-1-4-196,-21 8-458,4-4-1408,-13 8-7791,-4 2 9492,-2 2 1,0 1 0,-1 0-1</inkml:trace>
+  <inkml:trace contextRef="#ctx0" brushRef="#br0" timeOffset="34442">18583 13228 17468,'22'-32'92,"0"0"0,12-17 88,-32 89-108,-1-12 9,-3 26 1,-1 6-96,2-28 0,-1 0-9,-1 18 1,0 1-132,2-13 0,0-4-266,2 8-319,0 13-947,1-26-1927,1-13 3613,5-9 0,-3-5 0,1-3 0</inkml:trace>
+  <inkml:trace contextRef="#ctx0" brushRef="#br0" timeOffset="34932">18663 13180 14482,'17'-42'41,"-1"1"0,6 2 0,5 9 4,11 19 0,3 8-283,-7-3 1,3 1 377,23-4 0,2 0-563,-20 3 0,0 2 551,18-3 1,-2 0-70,-24 4 1,-3 0 119,32-1 267,-14 0-323,-1 0-2938,-2-2 2854,-22 3 165,-1 1-154,-15 1 946,2 5-765,-11 1 495,-11 21-282,-2 2-78,-8 19-111,6-1-12,6 6-85,5-10-59,7 13-95,7 4-158,-1 2 1590,-3-28 0,0 0-1668,-5 16 95,-4-13 180,-22 9-106,6-25 95,-7 0 0,-4-2 24,-12-3-37,10-4 1,-2-2-1,2-4 1,1-2-8,-23 2-1,7-5 0,-1-2-293,11-2 1,1 1 284,-7-1 0,-3 0-6,-5-4 0,2-1-36,18 3 0,1-2-98,-11-1 0,2-1-1543,-1-5-695,20 4 1643,15 4 1,7 5 0,1 0-1</inkml:trace>
+  <inkml:trace contextRef="#ctx0" brushRef="#br0" timeOffset="35165">19121 13338 17246,'41'38'-173,"-1"0"1,0 1-1,1-3 1,1-1-1,-1-3-2417,10-1 0,-1-3 1790,-1-3 1,-2-3 0,-14-6 0,-4-2 0,7 1-1</inkml:trace>
+  <inkml:trace contextRef="#ctx0" brushRef="#br0" timeOffset="39114">9314 15238 7375,'0'-5'4609,"0"2"-1047,0 3-3472,-15-28-90,9 21 0,-16-18 73,11 33 28,-7 8 50,-5 9 107,-6 10 83,-5 9-1760,10-8 1,1 1 1563,-9 17-41,8-7 0,2 1-277,9-12 0,2 0 181,0 10 1,1 1-20,4-3 0,5 0 2,5-2 1,4-2-9,4-3 0,4-2 28,5-3 1,4-3 49,12 0 1,3-4-184,-11-9 1,1-3 191,18 2 0,2-5-14,-11-7 0,0-3 1158,12-3 0,4-2-1139,2-5 1,0-4-200,1-5 1,-1-5 254,0-4 1,-3-5 5,-3-3 1,-3-5 2,-6-1 0,-4-4-12,-6 0 1,-4-2 8,-6 1 1,-5 0-239,-6 4 0,-3 1 252,-4 5 0,-4 1 478,-12-25-511,-14 11-135,-17 6 322,16 23 1,-4 2-444,-15-1 1,-2 3 90,13 4 0,-1 3-138,-19-1 0,-1 3-165,18 7 0,1 2-423,-4 3 0,1 5 773,8 5 0,5 2 0,-1 4 0,16 3 0</inkml:trace>
+  <inkml:trace contextRef="#ctx0" brushRef="#br0" timeOffset="39681">10772 15515 8881,'-10'3'5304,"2"0"-4867,8-3-403,0 0 610,24 3-229,21-2-230,15-1-1102,-4-5 0,4-2 1012,-17 1 0,0-1 0,5-1-32,9 0 0,6-1 0,2 1 0,-1-1-51,-4 2 1,-1-1 0,1 2 0,0-1-512,0 0 1,0 0 0,1 1 0,-1 0 486,0 1 1,1 0 0,-1 1 0,-2 0-10,-9 1 0,-3 0 0,2 0 0,2 0-6,4-1 0,4 0 0,1 0 1,0 0-1,-3 0 7,4 0 0,-3 0 1,0 0-1,1-1-22,4 0 0,2 0 0,-2 0 0,-2 0-154,2-1 0,-2 0 0,-4 1-47,-11 1 0,-3 0 1,1 0-974,5 0 1,0 0-1,-4 0 879,-1 1 0,-3 0 1,-4 1-1,-3-1 1,1 1-1</inkml:trace>
+  <inkml:trace contextRef="#ctx0" brushRef="#br0" timeOffset="41598">10396 16666 6781,'4'3'2111,"0"-2"-867,-4-1-258,77-18-709,-46 12 0,2-1-790,11-2 1,6-1 0,0 0 573,12 0 1,1 1-493,-14 2 1,2 0 0,1 0 441,7-1 0,2 1 0,3 0-597,-11 1 1,1 0 0,2 0-1,1 0 586,-6 1 0,0 0 0,1 0 0,1 1 0,1-1 1,5 1 0,1-1 0,1 0 1,1 1-1,0-1-258,-6 1 0,0 1 0,2-1 0,-1 1 0,2-1 0,-1 0 269,-4 1 1,-1 0 0,1-1 0,1 1 0,-1 0 0,2 0 0,-1-1-92,3 1 1,0 0 0,1-1 0,0 1-1,0-1 1,1 1 0,-1-1 130,3 1 0,1-1 0,-1 0 0,1 0 0,0 0 0,1 0 0,-1 0-8,-5 0 1,0 1 0,0-1-1,0 0 1,0 0 0,1 1-1,0-1 1,0 0 79,1 0 1,1 0-1,1 0 1,-1 0 0,1 0-1,0-1 1,0 1 0,0 0-31,-6 0 1,1 0-1,0 0 1,0 0-1,1 0 1,-1 0 0,1 0-1,-1 0 1,1 0-30,1 0 0,0 0 1,1 0-1,-1 0 1,1 0-1,-1-1 1,1 1-1,0 0 1,0 0-25,1 0 0,0 0 0,1-1 0,-1 1 0,1 0 0,-1 0 0,1 0 0,0 0 0,0 0-25,-5 0 0,0 0 0,-1 1 1,1-1-1,0 0 0,0 1 1,1-1-1,-1 1 0,0-1 1,1 1-13,0-1 0,1 1 1,-1 0-1,1-1 1,0 1-1,0 0 1,0 0-1,0 0 1,0 0-1,0 0-5,1 0 1,0 0-1,0 0 1,1 0-1,-1 0 1,0 0-1,1 0 1,-1 0-1,1 0 1,-1 1-7,1-1 1,0 1 0,0-1 0,0 1 0,1-1 0,-1 1 0,0 0-1,0 0 1,1-1 0,-1 1-6,0 0 1,1 0 0,-1 0 0,1 0 0,-1 0 0,1 0 0,0 0-1,-1 0 1,0 0 0,1 0-9,-2 1 0,1-1 1,-1 0-1,1 1 1,-1-1-1,1 0 1,-1 1-1,0-1 1,0 1-1,0 0-12,-1-1 0,0 1 0,0 0 0,-1-1 0,1 1 0,0 0 0,-1 0 1,0 0-1,0 0 0,0 0-30,4-1 1,1 1 0,-1 0 0,0 0 0,-1 0 0,1-1 0,-1 1 0,0 0 0,-1 0-89,-2 0 0,0 0 0,0 0 0,-1 0 0,0 0 0,0 1 1,-1-1-1,0 0 0,0 0-521,3 0 1,0 0 0,1 1 0,-2-1 0,0 0 0,-1 0 0,-1 1 0,-1-1 670,8 0 0,-1 1 0,-1-1 0,-3 1 0,-1-1 0,-5 1 0,5-1 0,-3 1 0,-4 0 0,-5 0 0,6 0 0,0 0 0</inkml:trace>
+  <inkml:trace contextRef="#ctx0" brushRef="#br0" timeOffset="46576">24489 3230 8466,'-14'2'5400,"2"1"-4929,12-3 167,0 0 242,-13 6-225,49-7-308,23 2-1001,-18-3 0,8-1 0,1 0 670,9 0 1,4 0 0,1 0-710,-9 0 1,2 0-1,1 1 1,0 0 649,-8-1 1,1 1-1,0 0 1,2 0-1,1 1-56,2-1 0,4 0 0,1 0 0,0 0 0,-2 0 1,-3 0-330,7 1 0,-3-1 0,0 0 0,4 0 311,-7 1 0,4-1 0,1 1 1,1 0-1,-2-1 0,-4 1-581,6 0 1,-3 0 0,-1-1 0,3 1 114,-3 0 1,3 1-1,1-1 1,0 0 0,-1 0 582,2 0 0,1 1 0,-1-1 0,-3 0 0,-4 0 0,3 1 0,-5-1 0,-2 1 0,-7 0 0,0-1 0,-1 1 0</inkml:trace>
+  <inkml:trace contextRef="#ctx0" brushRef="#br0" timeOffset="46981">25214 2033 13709,'38'-1'735,"1"0"1,13-1 0,6 0-628,-2 0 1,6-1-1,4 1-1246,-13 0 0,4 0 1,2 0-1,0 0 1,-1 1 1046,-2-1 0,-2 1 1,1 0-1,0 1 0,0-1-228,-1 0 1,1 0-1,0 0 1,0 0-1,-1 0-227,0 1 1,0-1 0,0 1-1,-1 0 1,-1 0 501,5 0 0,-1 0 0,-2 0 0,-2 0 0,2 0 0,-3 0 0,-2 0 0,14 0 0,-1 0 0</inkml:trace>
+  <inkml:trace contextRef="#ctx0" brushRef="#br0" timeOffset="48418">24943 3816 18324,'3'-35'-196,"-1"0"0,2-19 314,-2 64 39,1 12-56,3 16-34,2 13-11,-1 9-239,-3 2 278,-4-4-44,-2-15 145,-7-1 56,-4-17 286,-6 3 89,4-14-45,1-6-268,7-14-152,2-10-44,0-13 227,0-14-317,4 9 0,0-2-17,-1-16-220,2 11 0,1 2 209,2 0-11,4 4 0,4 0-45,11-7 34,6-6-273,23 15 228,-12 19-28,19 1 33,-24 14-55,8 18 78,-19 6 5,5 15 34,-17-8 0,-15 21 11,-6-25 6,-9 3 0,-5 1 11,-16 0-168,10-9 0,-1-1 163,-18 5-6,11-6-17,14-8 385,7 2-385,11-5 206,-1 8-195,9 0 6,10 3 5,12 1-22,18-2-56,15-7-115,-23-8 0,1-2-3,4-2 1,0-1-163,0-3 0,0 0-140,21-4-664,-23-1 0,-2-1-333,3-6 868,5-2-689,-20-2 869,-16 6 397,-6-6 860,-10 2-171,-7-1 616,-1-3 151,3 1-694,4 4 1070,0-4-1037,5 9-342,-1-2-358,4 8-352,1 3 5,0 2 224,4 3 62,4 3 16,9 4-5,8 2 5,4-3 1,1-3 38,-4-3 57,-6-3-40,-8-2 163,-3-7-129,-5-3-62,-7-6-44,-7 0 11,-11 0 27,-6 1 29,-3 2-22,6 5 49,-4 3-88,12 6-12,-7 6 0,5 11 5,3 2-10,-4 25-1,8-5-16,0 16-23,12-9 34,8-12-68,32 6-94,10-18-37,-10-7 0,4-2-730,1-6 1,0-4-3977,0 0 1,-1-1 4153,-10-1 0,-4 0 0,10-1 0,-30 0 0</inkml:trace>
+  <inkml:trace contextRef="#ctx0" brushRef="#br0" timeOffset="49824">26028 3887 3840,'3'-7'6710,"-2"2"-2767,-1 5-2453,0 0-648,-26-29-668,3 29 379,-26-16-379,10 40-67,-1 6-63,5 9-2277,8 16 2228,14-16-74,11 15-78,17-20-112,13 4-207,10-8-1282,19-10 760,-17-9-1544,21-13-102,-17-9 1086,11-11 1312,-6-6 4064,-10-4-2860,-16-1 532,-11 1 487,-8 4 347,-3 5-223,-3 5-180,0 5-1557,0 7-5,-1 2-382,2 4-72,-1 0 112,1 6 22,1 2-11,-1 6 34,5 0 33,1-1 50,7-3 51,4-5-56,6-3 28,11-11-112,-9 1 84,8-12 45,-16 1-23,0-6-27,-9-2-6,-10-5-90,-8 7-17,-2 2 23,-5 7-45,4 9-78,0 2-18,3 9 102,3 9-12,2 3-16,0 16 0,2 2-34,-2 14-23,0 4-128,0 7 112,3-21-135,4 6-33,5-26-6,7-2 40,6-8 55,12-13 90,9-7 90,6-12 83,-1-4 46,-9-3 38,-10 3 225,-10 1-247,-8 12 95,-4 1-89,-3 9-151,-1 2-129,1 2 27,1 1 102,3 3 28,3 5-1,5 7-22,0 6 1,1 4 4,-4 7-10,-3-11 11,-2 3-6,-3-13 67,0-3 186,1-3-7,2-6-150,15-12-91,-4 1 29,19-13-22,-17 11 39,13-7-23,-17 11-61,4 0-6,-12 9-7,0 3 2,1 3-3359,6 8 3392,-2-3 39,10 6 1,-3-9-23,4 0 22,10-7-11,-3-7 28,17-11 3375,-9-7-3392,1-14-11,-19 6 12,-5-19-24,-10 2 1,-3 19 0,-2-2 33,-4-3 1,-1 2 50,-6-18-45,-2 10 56,5 19-62,4 14-240,2 2 128,1 12 79,0 11-6,0 16-5,-1-1-18,-2 22-10,2-3-20,1-18 0,1 1-81,2 0 0,3-1-155,3 3 0,1-1 88,8 10-460,10 3-346,-9-30-1788,8-3 1148,-9-9-8132,8-17 9768,-15 4 0,1-6 0,-8 11 0</inkml:trace>
+  <inkml:trace contextRef="#ctx0" brushRef="#br0" timeOffset="50001">26911 3863 19608,'49'-15'608,"0"1"1,7-1-1,-6 3-373,-10 9-117,14-1-85,-23 2-77,-6 2-68,-8 0-1938,5 3 2050,-10 2 0,1-1 0,-8 1 0</inkml:trace>
 </inkml:ink>
 </file>
 
@@ -477,7 +574,7 @@
           <a:p>
             <a:fld id="{8D1A599A-E44C-4E47-966F-BAD7BBD3E025}" type="datetimeFigureOut">
               <a:rPr lang="en-US" smtClean="0"/>
-              <a:t>3/18/26</a:t>
+              <a:t>3/20/26</a:t>
             </a:fld>
             <a:endParaRPr lang="en-US"/>
           </a:p>
@@ -675,7 +772,7 @@
           <a:p>
             <a:fld id="{8D1A599A-E44C-4E47-966F-BAD7BBD3E025}" type="datetimeFigureOut">
               <a:rPr lang="en-US" smtClean="0"/>
-              <a:t>3/18/26</a:t>
+              <a:t>3/20/26</a:t>
             </a:fld>
             <a:endParaRPr lang="en-US"/>
           </a:p>
@@ -883,7 +980,7 @@
           <a:p>
             <a:fld id="{8D1A599A-E44C-4E47-966F-BAD7BBD3E025}" type="datetimeFigureOut">
               <a:rPr lang="en-US" smtClean="0"/>
-              <a:t>3/18/26</a:t>
+              <a:t>3/20/26</a:t>
             </a:fld>
             <a:endParaRPr lang="en-US"/>
           </a:p>
@@ -1081,7 +1178,7 @@
           <a:p>
             <a:fld id="{8D1A599A-E44C-4E47-966F-BAD7BBD3E025}" type="datetimeFigureOut">
               <a:rPr lang="en-US" smtClean="0"/>
-              <a:t>3/18/26</a:t>
+              <a:t>3/20/26</a:t>
             </a:fld>
             <a:endParaRPr lang="en-US"/>
           </a:p>
@@ -1356,7 +1453,7 @@
           <a:p>
             <a:fld id="{8D1A599A-E44C-4E47-966F-BAD7BBD3E025}" type="datetimeFigureOut">
               <a:rPr lang="en-US" smtClean="0"/>
-              <a:t>3/18/26</a:t>
+              <a:t>3/20/26</a:t>
             </a:fld>
             <a:endParaRPr lang="en-US"/>
           </a:p>
@@ -1621,7 +1718,7 @@
           <a:p>
             <a:fld id="{8D1A599A-E44C-4E47-966F-BAD7BBD3E025}" type="datetimeFigureOut">
               <a:rPr lang="en-US" smtClean="0"/>
-              <a:t>3/18/26</a:t>
+              <a:t>3/20/26</a:t>
             </a:fld>
             <a:endParaRPr lang="en-US"/>
           </a:p>
@@ -2033,7 +2130,7 @@
           <a:p>
             <a:fld id="{8D1A599A-E44C-4E47-966F-BAD7BBD3E025}" type="datetimeFigureOut">
               <a:rPr lang="en-US" smtClean="0"/>
-              <a:t>3/18/26</a:t>
+              <a:t>3/20/26</a:t>
             </a:fld>
             <a:endParaRPr lang="en-US"/>
           </a:p>
@@ -2174,7 +2271,7 @@
           <a:p>
             <a:fld id="{8D1A599A-E44C-4E47-966F-BAD7BBD3E025}" type="datetimeFigureOut">
               <a:rPr lang="en-US" smtClean="0"/>
-              <a:t>3/18/26</a:t>
+              <a:t>3/20/26</a:t>
             </a:fld>
             <a:endParaRPr lang="en-US"/>
           </a:p>
@@ -2287,7 +2384,7 @@
           <a:p>
             <a:fld id="{8D1A599A-E44C-4E47-966F-BAD7BBD3E025}" type="datetimeFigureOut">
               <a:rPr lang="en-US" smtClean="0"/>
-              <a:t>3/18/26</a:t>
+              <a:t>3/20/26</a:t>
             </a:fld>
             <a:endParaRPr lang="en-US"/>
           </a:p>
@@ -2598,7 +2695,7 @@
           <a:p>
             <a:fld id="{8D1A599A-E44C-4E47-966F-BAD7BBD3E025}" type="datetimeFigureOut">
               <a:rPr lang="en-US" smtClean="0"/>
-              <a:t>3/18/26</a:t>
+              <a:t>3/20/26</a:t>
             </a:fld>
             <a:endParaRPr lang="en-US"/>
           </a:p>
@@ -2886,7 +2983,7 @@
           <a:p>
             <a:fld id="{8D1A599A-E44C-4E47-966F-BAD7BBD3E025}" type="datetimeFigureOut">
               <a:rPr lang="en-US" smtClean="0"/>
-              <a:t>3/18/26</a:t>
+              <a:t>3/20/26</a:t>
             </a:fld>
             <a:endParaRPr lang="en-US"/>
           </a:p>
@@ -3127,7 +3224,7 @@
           <a:p>
             <a:fld id="{8D1A599A-E44C-4E47-966F-BAD7BBD3E025}" type="datetimeFigureOut">
               <a:rPr lang="en-US" smtClean="0"/>
-              <a:t>3/18/26</a:t>
+              <a:t>3/20/26</a:t>
             </a:fld>
             <a:endParaRPr lang="en-US"/>
           </a:p>
@@ -3540,7 +3637,13 @@
     </p:bg>
     <p:spTree>
       <p:nvGrpSpPr>
-        <p:cNvPr id="1" name=""/>
+        <p:cNvPr id="1" name="">
+          <a:extLst>
+            <a:ext uri="{FF2B5EF4-FFF2-40B4-BE49-F238E27FC236}">
+              <a16:creationId xmlns:a16="http://schemas.microsoft.com/office/drawing/2014/main" id="{B81622FE-C8AD-3CEA-4CA4-6C132530B8F3}"/>
+            </a:ext>
+          </a:extLst>
+        </p:cNvPr>
         <p:cNvGrpSpPr/>
         <p:nvPr/>
       </p:nvGrpSpPr>
@@ -3557,7 +3660,7 @@
           <p:cNvPr id="10" name="Rectangle 9">
             <a:extLst>
               <a:ext uri="{FF2B5EF4-FFF2-40B4-BE49-F238E27FC236}">
-                <a16:creationId xmlns:a16="http://schemas.microsoft.com/office/drawing/2014/main" id="{42A4FC2C-047E-45A5-965D-8E1E3BF09BC6}"/>
+                <a16:creationId xmlns:a16="http://schemas.microsoft.com/office/drawing/2014/main" id="{BDEE6C98-7186-3DD5-E45A-514E8BB1B67F}"/>
               </a:ext>
               <a:ext uri="{C183D7F6-B498-43B3-948B-1728B52AA6E4}">
                 <adec:decorative xmlns:adec="http://schemas.microsoft.com/office/drawing/2017/decorative" val="1"/>
@@ -3712,7 +3815,7 @@
           <p:cNvPr id="5" name="Picture 4" descr="A white and blue gradient&#10;&#10;AI-generated content may be incorrect.">
             <a:extLst>
               <a:ext uri="{FF2B5EF4-FFF2-40B4-BE49-F238E27FC236}">
-                <a16:creationId xmlns:a16="http://schemas.microsoft.com/office/drawing/2014/main" id="{82E8FFED-7D97-D6EB-DB3B-F70BAA42A624}"/>
+                <a16:creationId xmlns:a16="http://schemas.microsoft.com/office/drawing/2014/main" id="{87AE4F17-7E91-0989-D9C1-2115A3C061D6}"/>
               </a:ext>
             </a:extLst>
           </p:cNvPr>
@@ -3738,468 +3841,8 @@
           </a:prstGeom>
         </p:spPr>
       </p:pic>
-    </p:spTree>
-    <p:extLst>
-      <p:ext uri="{BB962C8B-B14F-4D97-AF65-F5344CB8AC3E}">
-        <p14:creationId xmlns:p14="http://schemas.microsoft.com/office/powerpoint/2010/main" val="2679234382"/>
-      </p:ext>
-    </p:extLst>
-  </p:cSld>
-  <p:clrMapOvr>
-    <a:masterClrMapping/>
-  </p:clrMapOvr>
-</p:sld>
-</file>
-
-<file path=ppt/slides/slide2.xml><?xml version="1.0" encoding="utf-8"?>
-<p:sld xmlns:a="http://schemas.openxmlformats.org/drawingml/2006/main" xmlns:r="http://schemas.openxmlformats.org/officeDocument/2006/relationships" xmlns:p="http://schemas.openxmlformats.org/presentationml/2006/main">
-  <p:cSld>
-    <p:bg>
-      <p:bgPr>
-        <a:solidFill>
-          <a:schemeClr val="bg1"/>
-        </a:solidFill>
-        <a:effectLst/>
-      </p:bgPr>
-    </p:bg>
-    <p:spTree>
-      <p:nvGrpSpPr>
-        <p:cNvPr id="1" name="">
-          <a:extLst>
-            <a:ext uri="{FF2B5EF4-FFF2-40B4-BE49-F238E27FC236}">
-              <a16:creationId xmlns:a16="http://schemas.microsoft.com/office/drawing/2014/main" id="{41097390-55FF-7CC0-84F7-83885CBC8CC6}"/>
-            </a:ext>
-          </a:extLst>
-        </p:cNvPr>
-        <p:cNvGrpSpPr/>
-        <p:nvPr/>
-      </p:nvGrpSpPr>
-      <p:grpSpPr>
-        <a:xfrm>
-          <a:off x="0" y="0"/>
-          <a:ext cx="0" cy="0"/>
-          <a:chOff x="0" y="0"/>
-          <a:chExt cx="0" cy="0"/>
-        </a:xfrm>
-      </p:grpSpPr>
-      <p:sp>
-        <p:nvSpPr>
-          <p:cNvPr id="10" name="Rectangle 9">
-            <a:extLst>
-              <a:ext uri="{FF2B5EF4-FFF2-40B4-BE49-F238E27FC236}">
-                <a16:creationId xmlns:a16="http://schemas.microsoft.com/office/drawing/2014/main" id="{8485E8C8-0288-33D9-888F-062E2A23CA5E}"/>
-              </a:ext>
-              <a:ext uri="{C183D7F6-B498-43B3-948B-1728B52AA6E4}">
-                <adec:decorative xmlns:adec="http://schemas.microsoft.com/office/drawing/2017/decorative" val="1"/>
-              </a:ext>
-            </a:extLst>
-          </p:cNvPr>
-          <p:cNvSpPr>
-            <a:spLocks noGrp="1" noRot="1" noChangeAspect="1" noMove="1" noResize="1" noEditPoints="1" noAdjustHandles="1" noChangeArrowheads="1" noChangeShapeType="1" noTextEdit="1"/>
-          </p:cNvSpPr>
-          <p:nvPr>
-            <p:extLst>
-              <p:ext uri="{386F3935-93C4-4BCD-93E2-E3B085C9AB24}">
-                <p16:designElem xmlns:p16="http://schemas.microsoft.com/office/powerpoint/2015/main" val="1"/>
-              </p:ext>
-            </p:extLst>
-          </p:nvPr>
-        </p:nvSpPr>
-        <p:spPr bwMode="white">
-          <a:xfrm>
-            <a:off x="1524" y="0"/>
-            <a:ext cx="12188952" cy="6858000"/>
-          </a:xfrm>
-          <a:prstGeom prst="rect">
-            <a:avLst/>
-          </a:prstGeom>
-          <a:noFill/>
-          <a:ln>
-            <a:noFill/>
-          </a:ln>
-        </p:spPr>
-        <p:style>
-          <a:lnRef idx="2">
-            <a:schemeClr val="accent1">
-              <a:shade val="50000"/>
-            </a:schemeClr>
-          </a:lnRef>
-          <a:fillRef idx="1">
-            <a:schemeClr val="accent1"/>
-          </a:fillRef>
-          <a:effectRef idx="0">
-            <a:schemeClr val="accent1"/>
-          </a:effectRef>
-          <a:fontRef idx="minor">
-            <a:schemeClr val="lt1"/>
-          </a:fontRef>
-        </p:style>
-        <p:txBody>
-          <a:bodyPr rtlCol="0" anchor="ctr"/>
-          <a:lstStyle>
-            <a:defPPr>
-              <a:defRPr lang="en-US"/>
-            </a:defPPr>
-            <a:lvl1pPr marL="0" algn="l" defTabSz="914400" rtl="0" eaLnBrk="1" latinLnBrk="0" hangingPunct="1">
-              <a:defRPr sz="1800" kern="1200">
-                <a:solidFill>
-                  <a:schemeClr val="lt1"/>
-                </a:solidFill>
-                <a:latin typeface="+mn-lt"/>
-                <a:ea typeface="+mn-ea"/>
-                <a:cs typeface="+mn-cs"/>
-              </a:defRPr>
-            </a:lvl1pPr>
-            <a:lvl2pPr marL="457200" algn="l" defTabSz="914400" rtl="0" eaLnBrk="1" latinLnBrk="0" hangingPunct="1">
-              <a:defRPr sz="1800" kern="1200">
-                <a:solidFill>
-                  <a:schemeClr val="lt1"/>
-                </a:solidFill>
-                <a:latin typeface="+mn-lt"/>
-                <a:ea typeface="+mn-ea"/>
-                <a:cs typeface="+mn-cs"/>
-              </a:defRPr>
-            </a:lvl2pPr>
-            <a:lvl3pPr marL="914400" algn="l" defTabSz="914400" rtl="0" eaLnBrk="1" latinLnBrk="0" hangingPunct="1">
-              <a:defRPr sz="1800" kern="1200">
-                <a:solidFill>
-                  <a:schemeClr val="lt1"/>
-                </a:solidFill>
-                <a:latin typeface="+mn-lt"/>
-                <a:ea typeface="+mn-ea"/>
-                <a:cs typeface="+mn-cs"/>
-              </a:defRPr>
-            </a:lvl3pPr>
-            <a:lvl4pPr marL="1371600" algn="l" defTabSz="914400" rtl="0" eaLnBrk="1" latinLnBrk="0" hangingPunct="1">
-              <a:defRPr sz="1800" kern="1200">
-                <a:solidFill>
-                  <a:schemeClr val="lt1"/>
-                </a:solidFill>
-                <a:latin typeface="+mn-lt"/>
-                <a:ea typeface="+mn-ea"/>
-                <a:cs typeface="+mn-cs"/>
-              </a:defRPr>
-            </a:lvl4pPr>
-            <a:lvl5pPr marL="1828800" algn="l" defTabSz="914400" rtl="0" eaLnBrk="1" latinLnBrk="0" hangingPunct="1">
-              <a:defRPr sz="1800" kern="1200">
-                <a:solidFill>
-                  <a:schemeClr val="lt1"/>
-                </a:solidFill>
-                <a:latin typeface="+mn-lt"/>
-                <a:ea typeface="+mn-ea"/>
-                <a:cs typeface="+mn-cs"/>
-              </a:defRPr>
-            </a:lvl5pPr>
-            <a:lvl6pPr marL="2286000" algn="l" defTabSz="914400" rtl="0" eaLnBrk="1" latinLnBrk="0" hangingPunct="1">
-              <a:defRPr sz="1800" kern="1200">
-                <a:solidFill>
-                  <a:schemeClr val="lt1"/>
-                </a:solidFill>
-                <a:latin typeface="+mn-lt"/>
-                <a:ea typeface="+mn-ea"/>
-                <a:cs typeface="+mn-cs"/>
-              </a:defRPr>
-            </a:lvl6pPr>
-            <a:lvl7pPr marL="2743200" algn="l" defTabSz="914400" rtl="0" eaLnBrk="1" latinLnBrk="0" hangingPunct="1">
-              <a:defRPr sz="1800" kern="1200">
-                <a:solidFill>
-                  <a:schemeClr val="lt1"/>
-                </a:solidFill>
-                <a:latin typeface="+mn-lt"/>
-                <a:ea typeface="+mn-ea"/>
-                <a:cs typeface="+mn-cs"/>
-              </a:defRPr>
-            </a:lvl7pPr>
-            <a:lvl8pPr marL="3200400" algn="l" defTabSz="914400" rtl="0" eaLnBrk="1" latinLnBrk="0" hangingPunct="1">
-              <a:defRPr sz="1800" kern="1200">
-                <a:solidFill>
-                  <a:schemeClr val="lt1"/>
-                </a:solidFill>
-                <a:latin typeface="+mn-lt"/>
-                <a:ea typeface="+mn-ea"/>
-                <a:cs typeface="+mn-cs"/>
-              </a:defRPr>
-            </a:lvl8pPr>
-            <a:lvl9pPr marL="3657600" algn="l" defTabSz="914400" rtl="0" eaLnBrk="1" latinLnBrk="0" hangingPunct="1">
-              <a:defRPr sz="1800" kern="1200">
-                <a:solidFill>
-                  <a:schemeClr val="lt1"/>
-                </a:solidFill>
-                <a:latin typeface="+mn-lt"/>
-                <a:ea typeface="+mn-ea"/>
-                <a:cs typeface="+mn-cs"/>
-              </a:defRPr>
-            </a:lvl9pPr>
-          </a:lstStyle>
-          <a:p>
-            <a:pPr algn="ctr"/>
-            <a:endParaRPr lang="en-US"/>
-          </a:p>
-        </p:txBody>
-      </p:sp>
-      <p:pic>
-        <p:nvPicPr>
-          <p:cNvPr id="5" name="Picture 4" descr="A white and blue gradient&#10;&#10;AI-generated content may be incorrect.">
-            <a:extLst>
-              <a:ext uri="{FF2B5EF4-FFF2-40B4-BE49-F238E27FC236}">
-                <a16:creationId xmlns:a16="http://schemas.microsoft.com/office/drawing/2014/main" id="{12EF6038-5142-F738-9E0F-5A690E4673E4}"/>
-              </a:ext>
-            </a:extLst>
-          </p:cNvPr>
-          <p:cNvPicPr>
-            <a:picLocks noChangeAspect="1"/>
-          </p:cNvPicPr>
-          <p:nvPr/>
-        </p:nvPicPr>
-        <p:blipFill>
-          <a:blip r:embed="rId2"/>
-          <a:srcRect b="19"/>
-          <a:stretch>
-            <a:fillRect/>
-          </a:stretch>
-        </p:blipFill>
-        <p:spPr>
-          <a:xfrm>
-            <a:off x="20" y="1282"/>
-            <a:ext cx="12191980" cy="6856718"/>
-          </a:xfrm>
-          <a:prstGeom prst="rect">
-            <a:avLst/>
-          </a:prstGeom>
-        </p:spPr>
-      </p:pic>
-    </p:spTree>
-    <p:extLst>
-      <p:ext uri="{BB962C8B-B14F-4D97-AF65-F5344CB8AC3E}">
-        <p14:creationId xmlns:p14="http://schemas.microsoft.com/office/powerpoint/2010/main" val="2891356024"/>
-      </p:ext>
-    </p:extLst>
-  </p:cSld>
-  <p:clrMapOvr>
-    <a:masterClrMapping/>
-  </p:clrMapOvr>
-</p:sld>
-</file>
-
-<file path=ppt/slides/slide3.xml><?xml version="1.0" encoding="utf-8"?>
-<p:sld xmlns:a="http://schemas.openxmlformats.org/drawingml/2006/main" xmlns:r="http://schemas.openxmlformats.org/officeDocument/2006/relationships" xmlns:p="http://schemas.openxmlformats.org/presentationml/2006/main">
-  <p:cSld>
-    <p:bg>
-      <p:bgPr>
-        <a:solidFill>
-          <a:schemeClr val="bg1"/>
-        </a:solidFill>
-        <a:effectLst/>
-      </p:bgPr>
-    </p:bg>
-    <p:spTree>
-      <p:nvGrpSpPr>
-        <p:cNvPr id="1" name="">
-          <a:extLst>
-            <a:ext uri="{FF2B5EF4-FFF2-40B4-BE49-F238E27FC236}">
-              <a16:creationId xmlns:a16="http://schemas.microsoft.com/office/drawing/2014/main" id="{B81622FE-C8AD-3CEA-4CA4-6C132530B8F3}"/>
-            </a:ext>
-          </a:extLst>
-        </p:cNvPr>
-        <p:cNvGrpSpPr/>
-        <p:nvPr/>
-      </p:nvGrpSpPr>
-      <p:grpSpPr>
-        <a:xfrm>
-          <a:off x="0" y="0"/>
-          <a:ext cx="0" cy="0"/>
-          <a:chOff x="0" y="0"/>
-          <a:chExt cx="0" cy="0"/>
-        </a:xfrm>
-      </p:grpSpPr>
-      <p:sp>
-        <p:nvSpPr>
-          <p:cNvPr id="10" name="Rectangle 9">
-            <a:extLst>
-              <a:ext uri="{FF2B5EF4-FFF2-40B4-BE49-F238E27FC236}">
-                <a16:creationId xmlns:a16="http://schemas.microsoft.com/office/drawing/2014/main" id="{BDEE6C98-7186-3DD5-E45A-514E8BB1B67F}"/>
-              </a:ext>
-              <a:ext uri="{C183D7F6-B498-43B3-948B-1728B52AA6E4}">
-                <adec:decorative xmlns:adec="http://schemas.microsoft.com/office/drawing/2017/decorative" val="1"/>
-              </a:ext>
-            </a:extLst>
-          </p:cNvPr>
-          <p:cNvSpPr>
-            <a:spLocks noGrp="1" noRot="1" noChangeAspect="1" noMove="1" noResize="1" noEditPoints="1" noAdjustHandles="1" noChangeArrowheads="1" noChangeShapeType="1" noTextEdit="1"/>
-          </p:cNvSpPr>
-          <p:nvPr>
-            <p:extLst>
-              <p:ext uri="{386F3935-93C4-4BCD-93E2-E3B085C9AB24}">
-                <p16:designElem xmlns:p16="http://schemas.microsoft.com/office/powerpoint/2015/main" val="1"/>
-              </p:ext>
-            </p:extLst>
-          </p:nvPr>
-        </p:nvSpPr>
-        <p:spPr bwMode="white">
-          <a:xfrm>
-            <a:off x="1524" y="0"/>
-            <a:ext cx="12188952" cy="6858000"/>
-          </a:xfrm>
-          <a:prstGeom prst="rect">
-            <a:avLst/>
-          </a:prstGeom>
-          <a:noFill/>
-          <a:ln>
-            <a:noFill/>
-          </a:ln>
-        </p:spPr>
-        <p:style>
-          <a:lnRef idx="2">
-            <a:schemeClr val="accent1">
-              <a:shade val="50000"/>
-            </a:schemeClr>
-          </a:lnRef>
-          <a:fillRef idx="1">
-            <a:schemeClr val="accent1"/>
-          </a:fillRef>
-          <a:effectRef idx="0">
-            <a:schemeClr val="accent1"/>
-          </a:effectRef>
-          <a:fontRef idx="minor">
-            <a:schemeClr val="lt1"/>
-          </a:fontRef>
-        </p:style>
-        <p:txBody>
-          <a:bodyPr rtlCol="0" anchor="ctr"/>
-          <a:lstStyle>
-            <a:defPPr>
-              <a:defRPr lang="en-US"/>
-            </a:defPPr>
-            <a:lvl1pPr marL="0" algn="l" defTabSz="914400" rtl="0" eaLnBrk="1" latinLnBrk="0" hangingPunct="1">
-              <a:defRPr sz="1800" kern="1200">
-                <a:solidFill>
-                  <a:schemeClr val="lt1"/>
-                </a:solidFill>
-                <a:latin typeface="+mn-lt"/>
-                <a:ea typeface="+mn-ea"/>
-                <a:cs typeface="+mn-cs"/>
-              </a:defRPr>
-            </a:lvl1pPr>
-            <a:lvl2pPr marL="457200" algn="l" defTabSz="914400" rtl="0" eaLnBrk="1" latinLnBrk="0" hangingPunct="1">
-              <a:defRPr sz="1800" kern="1200">
-                <a:solidFill>
-                  <a:schemeClr val="lt1"/>
-                </a:solidFill>
-                <a:latin typeface="+mn-lt"/>
-                <a:ea typeface="+mn-ea"/>
-                <a:cs typeface="+mn-cs"/>
-              </a:defRPr>
-            </a:lvl2pPr>
-            <a:lvl3pPr marL="914400" algn="l" defTabSz="914400" rtl="0" eaLnBrk="1" latinLnBrk="0" hangingPunct="1">
-              <a:defRPr sz="1800" kern="1200">
-                <a:solidFill>
-                  <a:schemeClr val="lt1"/>
-                </a:solidFill>
-                <a:latin typeface="+mn-lt"/>
-                <a:ea typeface="+mn-ea"/>
-                <a:cs typeface="+mn-cs"/>
-              </a:defRPr>
-            </a:lvl3pPr>
-            <a:lvl4pPr marL="1371600" algn="l" defTabSz="914400" rtl="0" eaLnBrk="1" latinLnBrk="0" hangingPunct="1">
-              <a:defRPr sz="1800" kern="1200">
-                <a:solidFill>
-                  <a:schemeClr val="lt1"/>
-                </a:solidFill>
-                <a:latin typeface="+mn-lt"/>
-                <a:ea typeface="+mn-ea"/>
-                <a:cs typeface="+mn-cs"/>
-              </a:defRPr>
-            </a:lvl4pPr>
-            <a:lvl5pPr marL="1828800" algn="l" defTabSz="914400" rtl="0" eaLnBrk="1" latinLnBrk="0" hangingPunct="1">
-              <a:defRPr sz="1800" kern="1200">
-                <a:solidFill>
-                  <a:schemeClr val="lt1"/>
-                </a:solidFill>
-                <a:latin typeface="+mn-lt"/>
-                <a:ea typeface="+mn-ea"/>
-                <a:cs typeface="+mn-cs"/>
-              </a:defRPr>
-            </a:lvl5pPr>
-            <a:lvl6pPr marL="2286000" algn="l" defTabSz="914400" rtl="0" eaLnBrk="1" latinLnBrk="0" hangingPunct="1">
-              <a:defRPr sz="1800" kern="1200">
-                <a:solidFill>
-                  <a:schemeClr val="lt1"/>
-                </a:solidFill>
-                <a:latin typeface="+mn-lt"/>
-                <a:ea typeface="+mn-ea"/>
-                <a:cs typeface="+mn-cs"/>
-              </a:defRPr>
-            </a:lvl6pPr>
-            <a:lvl7pPr marL="2743200" algn="l" defTabSz="914400" rtl="0" eaLnBrk="1" latinLnBrk="0" hangingPunct="1">
-              <a:defRPr sz="1800" kern="1200">
-                <a:solidFill>
-                  <a:schemeClr val="lt1"/>
-                </a:solidFill>
-                <a:latin typeface="+mn-lt"/>
-                <a:ea typeface="+mn-ea"/>
-                <a:cs typeface="+mn-cs"/>
-              </a:defRPr>
-            </a:lvl7pPr>
-            <a:lvl8pPr marL="3200400" algn="l" defTabSz="914400" rtl="0" eaLnBrk="1" latinLnBrk="0" hangingPunct="1">
-              <a:defRPr sz="1800" kern="1200">
-                <a:solidFill>
-                  <a:schemeClr val="lt1"/>
-                </a:solidFill>
-                <a:latin typeface="+mn-lt"/>
-                <a:ea typeface="+mn-ea"/>
-                <a:cs typeface="+mn-cs"/>
-              </a:defRPr>
-            </a:lvl8pPr>
-            <a:lvl9pPr marL="3657600" algn="l" defTabSz="914400" rtl="0" eaLnBrk="1" latinLnBrk="0" hangingPunct="1">
-              <a:defRPr sz="1800" kern="1200">
-                <a:solidFill>
-                  <a:schemeClr val="lt1"/>
-                </a:solidFill>
-                <a:latin typeface="+mn-lt"/>
-                <a:ea typeface="+mn-ea"/>
-                <a:cs typeface="+mn-cs"/>
-              </a:defRPr>
-            </a:lvl9pPr>
-          </a:lstStyle>
-          <a:p>
-            <a:pPr algn="ctr"/>
-            <a:endParaRPr lang="en-US"/>
-          </a:p>
-        </p:txBody>
-      </p:sp>
-      <p:pic>
-        <p:nvPicPr>
-          <p:cNvPr id="5" name="Picture 4" descr="A white and blue gradient&#10;&#10;AI-generated content may be incorrect.">
-            <a:extLst>
-              <a:ext uri="{FF2B5EF4-FFF2-40B4-BE49-F238E27FC236}">
-                <a16:creationId xmlns:a16="http://schemas.microsoft.com/office/drawing/2014/main" id="{87AE4F17-7E91-0989-D9C1-2115A3C061D6}"/>
-              </a:ext>
-            </a:extLst>
-          </p:cNvPr>
-          <p:cNvPicPr>
-            <a:picLocks noChangeAspect="1"/>
-          </p:cNvPicPr>
-          <p:nvPr/>
-        </p:nvPicPr>
-        <p:blipFill>
-          <a:blip r:embed="rId2"/>
-          <a:srcRect b="19"/>
-          <a:stretch>
-            <a:fillRect/>
-          </a:stretch>
-        </p:blipFill>
-        <p:spPr>
-          <a:xfrm>
-            <a:off x="20" y="1282"/>
-            <a:ext cx="12191980" cy="6856718"/>
-          </a:xfrm>
-          <a:prstGeom prst="rect">
-            <a:avLst/>
-          </a:prstGeom>
-        </p:spPr>
-      </p:pic>
-      <mc:AlternateContent xmlns:mc="http://schemas.openxmlformats.org/markup-compatibility/2006">
-        <mc:Choice xmlns:p14="http://schemas.microsoft.com/office/powerpoint/2010/main" Requires="p14">
+      <mc:AlternateContent xmlns:mc="http://schemas.openxmlformats.org/markup-compatibility/2006" xmlns:p14="http://schemas.microsoft.com/office/powerpoint/2010/main">
+        <mc:Choice Requires="p14">
           <p:contentPart p14:bwMode="auto" r:id="rId3">
             <p14:nvContentPartPr>
               <p14:cNvPr id="2" name="Ink 1">
@@ -4218,7 +3861,7 @@
             </p14:xfrm>
           </p:contentPart>
         </mc:Choice>
-        <mc:Fallback>
+        <mc:Fallback xmlns="">
           <p:pic>
             <p:nvPicPr>
               <p:cNvPr id="2" name="Ink 1">
@@ -4262,7 +3905,7 @@
 </p:sld>
 </file>
 
-<file path=ppt/slides/slide4.xml><?xml version="1.0" encoding="utf-8"?>
+<file path=ppt/slides/slide2.xml><?xml version="1.0" encoding="utf-8"?>
 <p:sld xmlns:a="http://schemas.openxmlformats.org/drawingml/2006/main" xmlns:r="http://schemas.openxmlformats.org/officeDocument/2006/relationships" xmlns:p="http://schemas.openxmlformats.org/presentationml/2006/main">
   <p:cSld>
     <p:bg>
@@ -4479,8 +4122,8 @@
           </a:prstGeom>
         </p:spPr>
       </p:pic>
-      <mc:AlternateContent xmlns:mc="http://schemas.openxmlformats.org/markup-compatibility/2006">
-        <mc:Choice xmlns:p14="http://schemas.microsoft.com/office/powerpoint/2010/main" Requires="p14">
+      <mc:AlternateContent xmlns:mc="http://schemas.openxmlformats.org/markup-compatibility/2006" xmlns:p14="http://schemas.microsoft.com/office/powerpoint/2010/main">
+        <mc:Choice Requires="p14">
           <p:contentPart p14:bwMode="auto" r:id="rId3">
             <p14:nvContentPartPr>
               <p14:cNvPr id="2" name="Ink 1">
@@ -4499,7 +4142,7 @@
             </p14:xfrm>
           </p:contentPart>
         </mc:Choice>
-        <mc:Fallback>
+        <mc:Fallback xmlns="">
           <p:pic>
             <p:nvPicPr>
               <p:cNvPr id="2" name="Ink 1">
@@ -4530,6 +4173,57 @@
           </p:pic>
         </mc:Fallback>
       </mc:AlternateContent>
+      <mc:AlternateContent xmlns:mc="http://schemas.openxmlformats.org/markup-compatibility/2006">
+        <mc:Choice xmlns:p14="http://schemas.microsoft.com/office/powerpoint/2010/main" Requires="p14">
+          <p:contentPart p14:bwMode="auto" r:id="rId5">
+            <p14:nvContentPartPr>
+              <p14:cNvPr id="3" name="Ink 2">
+                <a:extLst>
+                  <a:ext uri="{FF2B5EF4-FFF2-40B4-BE49-F238E27FC236}">
+                    <a16:creationId xmlns:a16="http://schemas.microsoft.com/office/drawing/2014/main" id="{8DD9167D-6762-AF11-88DC-5D75DFEF525A}"/>
+                  </a:ext>
+                </a:extLst>
+              </p14:cNvPr>
+              <p14:cNvContentPartPr/>
+              <p14:nvPr/>
+            </p14:nvContentPartPr>
+            <p14:xfrm>
+              <a:off x="4066920" y="2315520"/>
+              <a:ext cx="451080" cy="258480"/>
+            </p14:xfrm>
+          </p:contentPart>
+        </mc:Choice>
+        <mc:Fallback>
+          <p:pic>
+            <p:nvPicPr>
+              <p:cNvPr id="3" name="Ink 2">
+                <a:extLst>
+                  <a:ext uri="{FF2B5EF4-FFF2-40B4-BE49-F238E27FC236}">
+                    <a16:creationId xmlns:a16="http://schemas.microsoft.com/office/drawing/2014/main" id="{8DD9167D-6762-AF11-88DC-5D75DFEF525A}"/>
+                  </a:ext>
+                </a:extLst>
+              </p:cNvPr>
+              <p:cNvPicPr/>
+              <p:nvPr/>
+            </p:nvPicPr>
+            <p:blipFill>
+              <a:blip r:embed="rId6"/>
+              <a:stretch>
+                <a:fillRect/>
+              </a:stretch>
+            </p:blipFill>
+            <p:spPr>
+              <a:xfrm>
+                <a:off x="4057560" y="2306160"/>
+                <a:ext cx="469800" cy="277200"/>
+              </a:xfrm>
+              <a:prstGeom prst="rect">
+                <a:avLst/>
+              </a:prstGeom>
+            </p:spPr>
+          </p:pic>
+        </mc:Fallback>
+      </mc:AlternateContent>
     </p:spTree>
     <p:extLst>
       <p:ext uri="{BB962C8B-B14F-4D97-AF65-F5344CB8AC3E}">
@@ -4543,7 +4237,7 @@
 </p:sld>
 </file>
 
-<file path=ppt/slides/slide5.xml><?xml version="1.0" encoding="utf-8"?>
+<file path=ppt/slides/slide3.xml><?xml version="1.0" encoding="utf-8"?>
 <p:sld xmlns:a="http://schemas.openxmlformats.org/drawingml/2006/main" xmlns:r="http://schemas.openxmlformats.org/officeDocument/2006/relationships" xmlns:p="http://schemas.openxmlformats.org/presentationml/2006/main">
   <p:cSld>
     <p:bg>
@@ -4760,6 +4454,57 @@
           </a:prstGeom>
         </p:spPr>
       </p:pic>
+      <mc:AlternateContent xmlns:mc="http://schemas.openxmlformats.org/markup-compatibility/2006">
+        <mc:Choice xmlns:p14="http://schemas.microsoft.com/office/powerpoint/2010/main" Requires="p14">
+          <p:contentPart p14:bwMode="auto" r:id="rId3">
+            <p14:nvContentPartPr>
+              <p14:cNvPr id="2" name="Ink 1">
+                <a:extLst>
+                  <a:ext uri="{FF2B5EF4-FFF2-40B4-BE49-F238E27FC236}">
+                    <a16:creationId xmlns:a16="http://schemas.microsoft.com/office/drawing/2014/main" id="{6A32B73F-8D3E-50A4-16CE-5A0F34D49A88}"/>
+                  </a:ext>
+                </a:extLst>
+              </p14:cNvPr>
+              <p14:cNvContentPartPr/>
+              <p14:nvPr/>
+            </p14:nvContentPartPr>
+            <p14:xfrm>
+              <a:off x="387720" y="705960"/>
+              <a:ext cx="9508320" cy="5295600"/>
+            </p14:xfrm>
+          </p:contentPart>
+        </mc:Choice>
+        <mc:Fallback>
+          <p:pic>
+            <p:nvPicPr>
+              <p:cNvPr id="2" name="Ink 1">
+                <a:extLst>
+                  <a:ext uri="{FF2B5EF4-FFF2-40B4-BE49-F238E27FC236}">
+                    <a16:creationId xmlns:a16="http://schemas.microsoft.com/office/drawing/2014/main" id="{6A32B73F-8D3E-50A4-16CE-5A0F34D49A88}"/>
+                  </a:ext>
+                </a:extLst>
+              </p:cNvPr>
+              <p:cNvPicPr/>
+              <p:nvPr/>
+            </p:nvPicPr>
+            <p:blipFill>
+              <a:blip r:embed="rId4"/>
+              <a:stretch>
+                <a:fillRect/>
+              </a:stretch>
+            </p:blipFill>
+            <p:spPr>
+              <a:xfrm>
+                <a:off x="378360" y="696600"/>
+                <a:ext cx="9527040" cy="5314320"/>
+              </a:xfrm>
+              <a:prstGeom prst="rect">
+                <a:avLst/>
+              </a:prstGeom>
+            </p:spPr>
+          </p:pic>
+        </mc:Fallback>
+      </mc:AlternateContent>
     </p:spTree>
     <p:extLst>
       <p:ext uri="{BB962C8B-B14F-4D97-AF65-F5344CB8AC3E}">
@@ -4773,7 +4518,7 @@
 </p:sld>
 </file>
 
-<file path=ppt/slides/slide6.xml><?xml version="1.0" encoding="utf-8"?>
+<file path=ppt/slides/slide4.xml><?xml version="1.0" encoding="utf-8"?>
 <p:sld xmlns:a="http://schemas.openxmlformats.org/drawingml/2006/main" xmlns:r="http://schemas.openxmlformats.org/officeDocument/2006/relationships" xmlns:p="http://schemas.openxmlformats.org/presentationml/2006/main">
   <p:cSld>
     <p:bg>
@@ -5003,7 +4748,7 @@
 </p:sld>
 </file>
 
-<file path=ppt/slides/slide7.xml><?xml version="1.0" encoding="utf-8"?>
+<file path=ppt/slides/slide5.xml><?xml version="1.0" encoding="utf-8"?>
 <p:sld xmlns:a="http://schemas.openxmlformats.org/drawingml/2006/main" xmlns:r="http://schemas.openxmlformats.org/officeDocument/2006/relationships" xmlns:p="http://schemas.openxmlformats.org/presentationml/2006/main">
   <p:cSld>
     <p:bg>
@@ -5224,6 +4969,696 @@
     <p:extLst>
       <p:ext uri="{BB962C8B-B14F-4D97-AF65-F5344CB8AC3E}">
         <p14:creationId xmlns:p14="http://schemas.microsoft.com/office/powerpoint/2010/main" val="1458529133"/>
+      </p:ext>
+    </p:extLst>
+  </p:cSld>
+  <p:clrMapOvr>
+    <a:masterClrMapping/>
+  </p:clrMapOvr>
+</p:sld>
+</file>
+
+<file path=ppt/slides/slide6.xml><?xml version="1.0" encoding="utf-8"?>
+<p:sld xmlns:a="http://schemas.openxmlformats.org/drawingml/2006/main" xmlns:r="http://schemas.openxmlformats.org/officeDocument/2006/relationships" xmlns:p="http://schemas.openxmlformats.org/presentationml/2006/main">
+  <p:cSld>
+    <p:bg>
+      <p:bgPr>
+        <a:solidFill>
+          <a:schemeClr val="bg1"/>
+        </a:solidFill>
+        <a:effectLst/>
+      </p:bgPr>
+    </p:bg>
+    <p:spTree>
+      <p:nvGrpSpPr>
+        <p:cNvPr id="1" name="">
+          <a:extLst>
+            <a:ext uri="{FF2B5EF4-FFF2-40B4-BE49-F238E27FC236}">
+              <a16:creationId xmlns:a16="http://schemas.microsoft.com/office/drawing/2014/main" id="{5B7EF298-2091-58DB-48DE-14B1E133771D}"/>
+            </a:ext>
+          </a:extLst>
+        </p:cNvPr>
+        <p:cNvGrpSpPr/>
+        <p:nvPr/>
+      </p:nvGrpSpPr>
+      <p:grpSpPr>
+        <a:xfrm>
+          <a:off x="0" y="0"/>
+          <a:ext cx="0" cy="0"/>
+          <a:chOff x="0" y="0"/>
+          <a:chExt cx="0" cy="0"/>
+        </a:xfrm>
+      </p:grpSpPr>
+      <p:sp>
+        <p:nvSpPr>
+          <p:cNvPr id="10" name="Rectangle 9">
+            <a:extLst>
+              <a:ext uri="{FF2B5EF4-FFF2-40B4-BE49-F238E27FC236}">
+                <a16:creationId xmlns:a16="http://schemas.microsoft.com/office/drawing/2014/main" id="{89A7625F-83B6-E534-CE36-1026DAE2E47C}"/>
+              </a:ext>
+              <a:ext uri="{C183D7F6-B498-43B3-948B-1728B52AA6E4}">
+                <adec:decorative xmlns:adec="http://schemas.microsoft.com/office/drawing/2017/decorative" val="1"/>
+              </a:ext>
+            </a:extLst>
+          </p:cNvPr>
+          <p:cNvSpPr>
+            <a:spLocks noGrp="1" noRot="1" noChangeAspect="1" noMove="1" noResize="1" noEditPoints="1" noAdjustHandles="1" noChangeArrowheads="1" noChangeShapeType="1" noTextEdit="1"/>
+          </p:cNvSpPr>
+          <p:nvPr>
+            <p:extLst>
+              <p:ext uri="{386F3935-93C4-4BCD-93E2-E3B085C9AB24}">
+                <p16:designElem xmlns:p16="http://schemas.microsoft.com/office/powerpoint/2015/main" val="1"/>
+              </p:ext>
+            </p:extLst>
+          </p:nvPr>
+        </p:nvSpPr>
+        <p:spPr bwMode="white">
+          <a:xfrm>
+            <a:off x="1524" y="0"/>
+            <a:ext cx="12188952" cy="6858000"/>
+          </a:xfrm>
+          <a:prstGeom prst="rect">
+            <a:avLst/>
+          </a:prstGeom>
+          <a:noFill/>
+          <a:ln>
+            <a:noFill/>
+          </a:ln>
+        </p:spPr>
+        <p:style>
+          <a:lnRef idx="2">
+            <a:schemeClr val="accent1">
+              <a:shade val="50000"/>
+            </a:schemeClr>
+          </a:lnRef>
+          <a:fillRef idx="1">
+            <a:schemeClr val="accent1"/>
+          </a:fillRef>
+          <a:effectRef idx="0">
+            <a:schemeClr val="accent1"/>
+          </a:effectRef>
+          <a:fontRef idx="minor">
+            <a:schemeClr val="lt1"/>
+          </a:fontRef>
+        </p:style>
+        <p:txBody>
+          <a:bodyPr rtlCol="0" anchor="ctr"/>
+          <a:lstStyle>
+            <a:defPPr>
+              <a:defRPr lang="en-US"/>
+            </a:defPPr>
+            <a:lvl1pPr marL="0" algn="l" defTabSz="914400" rtl="0" eaLnBrk="1" latinLnBrk="0" hangingPunct="1">
+              <a:defRPr sz="1800" kern="1200">
+                <a:solidFill>
+                  <a:schemeClr val="lt1"/>
+                </a:solidFill>
+                <a:latin typeface="+mn-lt"/>
+                <a:ea typeface="+mn-ea"/>
+                <a:cs typeface="+mn-cs"/>
+              </a:defRPr>
+            </a:lvl1pPr>
+            <a:lvl2pPr marL="457200" algn="l" defTabSz="914400" rtl="0" eaLnBrk="1" latinLnBrk="0" hangingPunct="1">
+              <a:defRPr sz="1800" kern="1200">
+                <a:solidFill>
+                  <a:schemeClr val="lt1"/>
+                </a:solidFill>
+                <a:latin typeface="+mn-lt"/>
+                <a:ea typeface="+mn-ea"/>
+                <a:cs typeface="+mn-cs"/>
+              </a:defRPr>
+            </a:lvl2pPr>
+            <a:lvl3pPr marL="914400" algn="l" defTabSz="914400" rtl="0" eaLnBrk="1" latinLnBrk="0" hangingPunct="1">
+              <a:defRPr sz="1800" kern="1200">
+                <a:solidFill>
+                  <a:schemeClr val="lt1"/>
+                </a:solidFill>
+                <a:latin typeface="+mn-lt"/>
+                <a:ea typeface="+mn-ea"/>
+                <a:cs typeface="+mn-cs"/>
+              </a:defRPr>
+            </a:lvl3pPr>
+            <a:lvl4pPr marL="1371600" algn="l" defTabSz="914400" rtl="0" eaLnBrk="1" latinLnBrk="0" hangingPunct="1">
+              <a:defRPr sz="1800" kern="1200">
+                <a:solidFill>
+                  <a:schemeClr val="lt1"/>
+                </a:solidFill>
+                <a:latin typeface="+mn-lt"/>
+                <a:ea typeface="+mn-ea"/>
+                <a:cs typeface="+mn-cs"/>
+              </a:defRPr>
+            </a:lvl4pPr>
+            <a:lvl5pPr marL="1828800" algn="l" defTabSz="914400" rtl="0" eaLnBrk="1" latinLnBrk="0" hangingPunct="1">
+              <a:defRPr sz="1800" kern="1200">
+                <a:solidFill>
+                  <a:schemeClr val="lt1"/>
+                </a:solidFill>
+                <a:latin typeface="+mn-lt"/>
+                <a:ea typeface="+mn-ea"/>
+                <a:cs typeface="+mn-cs"/>
+              </a:defRPr>
+            </a:lvl5pPr>
+            <a:lvl6pPr marL="2286000" algn="l" defTabSz="914400" rtl="0" eaLnBrk="1" latinLnBrk="0" hangingPunct="1">
+              <a:defRPr sz="1800" kern="1200">
+                <a:solidFill>
+                  <a:schemeClr val="lt1"/>
+                </a:solidFill>
+                <a:latin typeface="+mn-lt"/>
+                <a:ea typeface="+mn-ea"/>
+                <a:cs typeface="+mn-cs"/>
+              </a:defRPr>
+            </a:lvl6pPr>
+            <a:lvl7pPr marL="2743200" algn="l" defTabSz="914400" rtl="0" eaLnBrk="1" latinLnBrk="0" hangingPunct="1">
+              <a:defRPr sz="1800" kern="1200">
+                <a:solidFill>
+                  <a:schemeClr val="lt1"/>
+                </a:solidFill>
+                <a:latin typeface="+mn-lt"/>
+                <a:ea typeface="+mn-ea"/>
+                <a:cs typeface="+mn-cs"/>
+              </a:defRPr>
+            </a:lvl7pPr>
+            <a:lvl8pPr marL="3200400" algn="l" defTabSz="914400" rtl="0" eaLnBrk="1" latinLnBrk="0" hangingPunct="1">
+              <a:defRPr sz="1800" kern="1200">
+                <a:solidFill>
+                  <a:schemeClr val="lt1"/>
+                </a:solidFill>
+                <a:latin typeface="+mn-lt"/>
+                <a:ea typeface="+mn-ea"/>
+                <a:cs typeface="+mn-cs"/>
+              </a:defRPr>
+            </a:lvl8pPr>
+            <a:lvl9pPr marL="3657600" algn="l" defTabSz="914400" rtl="0" eaLnBrk="1" latinLnBrk="0" hangingPunct="1">
+              <a:defRPr sz="1800" kern="1200">
+                <a:solidFill>
+                  <a:schemeClr val="lt1"/>
+                </a:solidFill>
+                <a:latin typeface="+mn-lt"/>
+                <a:ea typeface="+mn-ea"/>
+                <a:cs typeface="+mn-cs"/>
+              </a:defRPr>
+            </a:lvl9pPr>
+          </a:lstStyle>
+          <a:p>
+            <a:pPr algn="ctr"/>
+            <a:endParaRPr lang="en-US"/>
+          </a:p>
+        </p:txBody>
+      </p:sp>
+      <p:pic>
+        <p:nvPicPr>
+          <p:cNvPr id="5" name="Picture 4" descr="A white and blue gradient&#10;&#10;AI-generated content may be incorrect.">
+            <a:extLst>
+              <a:ext uri="{FF2B5EF4-FFF2-40B4-BE49-F238E27FC236}">
+                <a16:creationId xmlns:a16="http://schemas.microsoft.com/office/drawing/2014/main" id="{7F74B9A1-3195-433B-5A8A-53029D46F566}"/>
+              </a:ext>
+            </a:extLst>
+          </p:cNvPr>
+          <p:cNvPicPr>
+            <a:picLocks noChangeAspect="1"/>
+          </p:cNvPicPr>
+          <p:nvPr/>
+        </p:nvPicPr>
+        <p:blipFill>
+          <a:blip r:embed="rId2"/>
+          <a:srcRect b="19"/>
+          <a:stretch>
+            <a:fillRect/>
+          </a:stretch>
+        </p:blipFill>
+        <p:spPr>
+          <a:xfrm>
+            <a:off x="20" y="1282"/>
+            <a:ext cx="12191980" cy="6856718"/>
+          </a:xfrm>
+          <a:prstGeom prst="rect">
+            <a:avLst/>
+          </a:prstGeom>
+        </p:spPr>
+      </p:pic>
+    </p:spTree>
+    <p:extLst>
+      <p:ext uri="{BB962C8B-B14F-4D97-AF65-F5344CB8AC3E}">
+        <p14:creationId xmlns:p14="http://schemas.microsoft.com/office/powerpoint/2010/main" val="3096406188"/>
+      </p:ext>
+    </p:extLst>
+  </p:cSld>
+  <p:clrMapOvr>
+    <a:masterClrMapping/>
+  </p:clrMapOvr>
+</p:sld>
+</file>
+
+<file path=ppt/slides/slide7.xml><?xml version="1.0" encoding="utf-8"?>
+<p:sld xmlns:a="http://schemas.openxmlformats.org/drawingml/2006/main" xmlns:r="http://schemas.openxmlformats.org/officeDocument/2006/relationships" xmlns:p="http://schemas.openxmlformats.org/presentationml/2006/main">
+  <p:cSld>
+    <p:bg>
+      <p:bgPr>
+        <a:solidFill>
+          <a:schemeClr val="bg1"/>
+        </a:solidFill>
+        <a:effectLst/>
+      </p:bgPr>
+    </p:bg>
+    <p:spTree>
+      <p:nvGrpSpPr>
+        <p:cNvPr id="1" name="">
+          <a:extLst>
+            <a:ext uri="{FF2B5EF4-FFF2-40B4-BE49-F238E27FC236}">
+              <a16:creationId xmlns:a16="http://schemas.microsoft.com/office/drawing/2014/main" id="{03428ED8-5C6A-2EE4-17F5-0CA43D2C7266}"/>
+            </a:ext>
+          </a:extLst>
+        </p:cNvPr>
+        <p:cNvGrpSpPr/>
+        <p:nvPr/>
+      </p:nvGrpSpPr>
+      <p:grpSpPr>
+        <a:xfrm>
+          <a:off x="0" y="0"/>
+          <a:ext cx="0" cy="0"/>
+          <a:chOff x="0" y="0"/>
+          <a:chExt cx="0" cy="0"/>
+        </a:xfrm>
+      </p:grpSpPr>
+      <p:sp>
+        <p:nvSpPr>
+          <p:cNvPr id="10" name="Rectangle 9">
+            <a:extLst>
+              <a:ext uri="{FF2B5EF4-FFF2-40B4-BE49-F238E27FC236}">
+                <a16:creationId xmlns:a16="http://schemas.microsoft.com/office/drawing/2014/main" id="{80C6AEFC-E83B-9643-D83D-C6A2D82F706B}"/>
+              </a:ext>
+              <a:ext uri="{C183D7F6-B498-43B3-948B-1728B52AA6E4}">
+                <adec:decorative xmlns:adec="http://schemas.microsoft.com/office/drawing/2017/decorative" val="1"/>
+              </a:ext>
+            </a:extLst>
+          </p:cNvPr>
+          <p:cNvSpPr>
+            <a:spLocks noGrp="1" noRot="1" noChangeAspect="1" noMove="1" noResize="1" noEditPoints="1" noAdjustHandles="1" noChangeArrowheads="1" noChangeShapeType="1" noTextEdit="1"/>
+          </p:cNvSpPr>
+          <p:nvPr>
+            <p:extLst>
+              <p:ext uri="{386F3935-93C4-4BCD-93E2-E3B085C9AB24}">
+                <p16:designElem xmlns:p16="http://schemas.microsoft.com/office/powerpoint/2015/main" val="1"/>
+              </p:ext>
+            </p:extLst>
+          </p:nvPr>
+        </p:nvSpPr>
+        <p:spPr bwMode="white">
+          <a:xfrm>
+            <a:off x="1524" y="0"/>
+            <a:ext cx="12188952" cy="6858000"/>
+          </a:xfrm>
+          <a:prstGeom prst="rect">
+            <a:avLst/>
+          </a:prstGeom>
+          <a:noFill/>
+          <a:ln>
+            <a:noFill/>
+          </a:ln>
+        </p:spPr>
+        <p:style>
+          <a:lnRef idx="2">
+            <a:schemeClr val="accent1">
+              <a:shade val="50000"/>
+            </a:schemeClr>
+          </a:lnRef>
+          <a:fillRef idx="1">
+            <a:schemeClr val="accent1"/>
+          </a:fillRef>
+          <a:effectRef idx="0">
+            <a:schemeClr val="accent1"/>
+          </a:effectRef>
+          <a:fontRef idx="minor">
+            <a:schemeClr val="lt1"/>
+          </a:fontRef>
+        </p:style>
+        <p:txBody>
+          <a:bodyPr rtlCol="0" anchor="ctr"/>
+          <a:lstStyle>
+            <a:defPPr>
+              <a:defRPr lang="en-US"/>
+            </a:defPPr>
+            <a:lvl1pPr marL="0" algn="l" defTabSz="914400" rtl="0" eaLnBrk="1" latinLnBrk="0" hangingPunct="1">
+              <a:defRPr sz="1800" kern="1200">
+                <a:solidFill>
+                  <a:schemeClr val="lt1"/>
+                </a:solidFill>
+                <a:latin typeface="+mn-lt"/>
+                <a:ea typeface="+mn-ea"/>
+                <a:cs typeface="+mn-cs"/>
+              </a:defRPr>
+            </a:lvl1pPr>
+            <a:lvl2pPr marL="457200" algn="l" defTabSz="914400" rtl="0" eaLnBrk="1" latinLnBrk="0" hangingPunct="1">
+              <a:defRPr sz="1800" kern="1200">
+                <a:solidFill>
+                  <a:schemeClr val="lt1"/>
+                </a:solidFill>
+                <a:latin typeface="+mn-lt"/>
+                <a:ea typeface="+mn-ea"/>
+                <a:cs typeface="+mn-cs"/>
+              </a:defRPr>
+            </a:lvl2pPr>
+            <a:lvl3pPr marL="914400" algn="l" defTabSz="914400" rtl="0" eaLnBrk="1" latinLnBrk="0" hangingPunct="1">
+              <a:defRPr sz="1800" kern="1200">
+                <a:solidFill>
+                  <a:schemeClr val="lt1"/>
+                </a:solidFill>
+                <a:latin typeface="+mn-lt"/>
+                <a:ea typeface="+mn-ea"/>
+                <a:cs typeface="+mn-cs"/>
+              </a:defRPr>
+            </a:lvl3pPr>
+            <a:lvl4pPr marL="1371600" algn="l" defTabSz="914400" rtl="0" eaLnBrk="1" latinLnBrk="0" hangingPunct="1">
+              <a:defRPr sz="1800" kern="1200">
+                <a:solidFill>
+                  <a:schemeClr val="lt1"/>
+                </a:solidFill>
+                <a:latin typeface="+mn-lt"/>
+                <a:ea typeface="+mn-ea"/>
+                <a:cs typeface="+mn-cs"/>
+              </a:defRPr>
+            </a:lvl4pPr>
+            <a:lvl5pPr marL="1828800" algn="l" defTabSz="914400" rtl="0" eaLnBrk="1" latinLnBrk="0" hangingPunct="1">
+              <a:defRPr sz="1800" kern="1200">
+                <a:solidFill>
+                  <a:schemeClr val="lt1"/>
+                </a:solidFill>
+                <a:latin typeface="+mn-lt"/>
+                <a:ea typeface="+mn-ea"/>
+                <a:cs typeface="+mn-cs"/>
+              </a:defRPr>
+            </a:lvl5pPr>
+            <a:lvl6pPr marL="2286000" algn="l" defTabSz="914400" rtl="0" eaLnBrk="1" latinLnBrk="0" hangingPunct="1">
+              <a:defRPr sz="1800" kern="1200">
+                <a:solidFill>
+                  <a:schemeClr val="lt1"/>
+                </a:solidFill>
+                <a:latin typeface="+mn-lt"/>
+                <a:ea typeface="+mn-ea"/>
+                <a:cs typeface="+mn-cs"/>
+              </a:defRPr>
+            </a:lvl6pPr>
+            <a:lvl7pPr marL="2743200" algn="l" defTabSz="914400" rtl="0" eaLnBrk="1" latinLnBrk="0" hangingPunct="1">
+              <a:defRPr sz="1800" kern="1200">
+                <a:solidFill>
+                  <a:schemeClr val="lt1"/>
+                </a:solidFill>
+                <a:latin typeface="+mn-lt"/>
+                <a:ea typeface="+mn-ea"/>
+                <a:cs typeface="+mn-cs"/>
+              </a:defRPr>
+            </a:lvl7pPr>
+            <a:lvl8pPr marL="3200400" algn="l" defTabSz="914400" rtl="0" eaLnBrk="1" latinLnBrk="0" hangingPunct="1">
+              <a:defRPr sz="1800" kern="1200">
+                <a:solidFill>
+                  <a:schemeClr val="lt1"/>
+                </a:solidFill>
+                <a:latin typeface="+mn-lt"/>
+                <a:ea typeface="+mn-ea"/>
+                <a:cs typeface="+mn-cs"/>
+              </a:defRPr>
+            </a:lvl8pPr>
+            <a:lvl9pPr marL="3657600" algn="l" defTabSz="914400" rtl="0" eaLnBrk="1" latinLnBrk="0" hangingPunct="1">
+              <a:defRPr sz="1800" kern="1200">
+                <a:solidFill>
+                  <a:schemeClr val="lt1"/>
+                </a:solidFill>
+                <a:latin typeface="+mn-lt"/>
+                <a:ea typeface="+mn-ea"/>
+                <a:cs typeface="+mn-cs"/>
+              </a:defRPr>
+            </a:lvl9pPr>
+          </a:lstStyle>
+          <a:p>
+            <a:pPr algn="ctr"/>
+            <a:endParaRPr lang="en-US"/>
+          </a:p>
+        </p:txBody>
+      </p:sp>
+      <p:pic>
+        <p:nvPicPr>
+          <p:cNvPr id="5" name="Picture 4" descr="A white and blue gradient&#10;&#10;AI-generated content may be incorrect.">
+            <a:extLst>
+              <a:ext uri="{FF2B5EF4-FFF2-40B4-BE49-F238E27FC236}">
+                <a16:creationId xmlns:a16="http://schemas.microsoft.com/office/drawing/2014/main" id="{461A16DA-53E8-B0F6-B952-C2EDB8B48F3C}"/>
+              </a:ext>
+            </a:extLst>
+          </p:cNvPr>
+          <p:cNvPicPr>
+            <a:picLocks noChangeAspect="1"/>
+          </p:cNvPicPr>
+          <p:nvPr/>
+        </p:nvPicPr>
+        <p:blipFill>
+          <a:blip r:embed="rId2"/>
+          <a:srcRect b="19"/>
+          <a:stretch>
+            <a:fillRect/>
+          </a:stretch>
+        </p:blipFill>
+        <p:spPr>
+          <a:xfrm>
+            <a:off x="20" y="1282"/>
+            <a:ext cx="12191980" cy="6856718"/>
+          </a:xfrm>
+          <a:prstGeom prst="rect">
+            <a:avLst/>
+          </a:prstGeom>
+        </p:spPr>
+      </p:pic>
+    </p:spTree>
+    <p:extLst>
+      <p:ext uri="{BB962C8B-B14F-4D97-AF65-F5344CB8AC3E}">
+        <p14:creationId xmlns:p14="http://schemas.microsoft.com/office/powerpoint/2010/main" val="359606896"/>
+      </p:ext>
+    </p:extLst>
+  </p:cSld>
+  <p:clrMapOvr>
+    <a:masterClrMapping/>
+  </p:clrMapOvr>
+</p:sld>
+</file>
+
+<file path=ppt/slides/slide8.xml><?xml version="1.0" encoding="utf-8"?>
+<p:sld xmlns:a="http://schemas.openxmlformats.org/drawingml/2006/main" xmlns:r="http://schemas.openxmlformats.org/officeDocument/2006/relationships" xmlns:p="http://schemas.openxmlformats.org/presentationml/2006/main">
+  <p:cSld>
+    <p:bg>
+      <p:bgPr>
+        <a:solidFill>
+          <a:schemeClr val="bg1"/>
+        </a:solidFill>
+        <a:effectLst/>
+      </p:bgPr>
+    </p:bg>
+    <p:spTree>
+      <p:nvGrpSpPr>
+        <p:cNvPr id="1" name="">
+          <a:extLst>
+            <a:ext uri="{FF2B5EF4-FFF2-40B4-BE49-F238E27FC236}">
+              <a16:creationId xmlns:a16="http://schemas.microsoft.com/office/drawing/2014/main" id="{C0EE54D3-B16B-12D3-4CD2-4D55E3B9AFE5}"/>
+            </a:ext>
+          </a:extLst>
+        </p:cNvPr>
+        <p:cNvGrpSpPr/>
+        <p:nvPr/>
+      </p:nvGrpSpPr>
+      <p:grpSpPr>
+        <a:xfrm>
+          <a:off x="0" y="0"/>
+          <a:ext cx="0" cy="0"/>
+          <a:chOff x="0" y="0"/>
+          <a:chExt cx="0" cy="0"/>
+        </a:xfrm>
+      </p:grpSpPr>
+      <p:sp>
+        <p:nvSpPr>
+          <p:cNvPr id="10" name="Rectangle 9">
+            <a:extLst>
+              <a:ext uri="{FF2B5EF4-FFF2-40B4-BE49-F238E27FC236}">
+                <a16:creationId xmlns:a16="http://schemas.microsoft.com/office/drawing/2014/main" id="{213D0501-C8CF-90B9-14FE-E663A2F79BF7}"/>
+              </a:ext>
+              <a:ext uri="{C183D7F6-B498-43B3-948B-1728B52AA6E4}">
+                <adec:decorative xmlns:adec="http://schemas.microsoft.com/office/drawing/2017/decorative" val="1"/>
+              </a:ext>
+            </a:extLst>
+          </p:cNvPr>
+          <p:cNvSpPr>
+            <a:spLocks noGrp="1" noRot="1" noChangeAspect="1" noMove="1" noResize="1" noEditPoints="1" noAdjustHandles="1" noChangeArrowheads="1" noChangeShapeType="1" noTextEdit="1"/>
+          </p:cNvSpPr>
+          <p:nvPr>
+            <p:extLst>
+              <p:ext uri="{386F3935-93C4-4BCD-93E2-E3B085C9AB24}">
+                <p16:designElem xmlns:p16="http://schemas.microsoft.com/office/powerpoint/2015/main" val="1"/>
+              </p:ext>
+            </p:extLst>
+          </p:nvPr>
+        </p:nvSpPr>
+        <p:spPr bwMode="white">
+          <a:xfrm>
+            <a:off x="1524" y="0"/>
+            <a:ext cx="12188952" cy="6858000"/>
+          </a:xfrm>
+          <a:prstGeom prst="rect">
+            <a:avLst/>
+          </a:prstGeom>
+          <a:noFill/>
+          <a:ln>
+            <a:noFill/>
+          </a:ln>
+        </p:spPr>
+        <p:style>
+          <a:lnRef idx="2">
+            <a:schemeClr val="accent1">
+              <a:shade val="50000"/>
+            </a:schemeClr>
+          </a:lnRef>
+          <a:fillRef idx="1">
+            <a:schemeClr val="accent1"/>
+          </a:fillRef>
+          <a:effectRef idx="0">
+            <a:schemeClr val="accent1"/>
+          </a:effectRef>
+          <a:fontRef idx="minor">
+            <a:schemeClr val="lt1"/>
+          </a:fontRef>
+        </p:style>
+        <p:txBody>
+          <a:bodyPr rtlCol="0" anchor="ctr"/>
+          <a:lstStyle>
+            <a:defPPr>
+              <a:defRPr lang="en-US"/>
+            </a:defPPr>
+            <a:lvl1pPr marL="0" algn="l" defTabSz="914400" rtl="0" eaLnBrk="1" latinLnBrk="0" hangingPunct="1">
+              <a:defRPr sz="1800" kern="1200">
+                <a:solidFill>
+                  <a:schemeClr val="lt1"/>
+                </a:solidFill>
+                <a:latin typeface="+mn-lt"/>
+                <a:ea typeface="+mn-ea"/>
+                <a:cs typeface="+mn-cs"/>
+              </a:defRPr>
+            </a:lvl1pPr>
+            <a:lvl2pPr marL="457200" algn="l" defTabSz="914400" rtl="0" eaLnBrk="1" latinLnBrk="0" hangingPunct="1">
+              <a:defRPr sz="1800" kern="1200">
+                <a:solidFill>
+                  <a:schemeClr val="lt1"/>
+                </a:solidFill>
+                <a:latin typeface="+mn-lt"/>
+                <a:ea typeface="+mn-ea"/>
+                <a:cs typeface="+mn-cs"/>
+              </a:defRPr>
+            </a:lvl2pPr>
+            <a:lvl3pPr marL="914400" algn="l" defTabSz="914400" rtl="0" eaLnBrk="1" latinLnBrk="0" hangingPunct="1">
+              <a:defRPr sz="1800" kern="1200">
+                <a:solidFill>
+                  <a:schemeClr val="lt1"/>
+                </a:solidFill>
+                <a:latin typeface="+mn-lt"/>
+                <a:ea typeface="+mn-ea"/>
+                <a:cs typeface="+mn-cs"/>
+              </a:defRPr>
+            </a:lvl3pPr>
+            <a:lvl4pPr marL="1371600" algn="l" defTabSz="914400" rtl="0" eaLnBrk="1" latinLnBrk="0" hangingPunct="1">
+              <a:defRPr sz="1800" kern="1200">
+                <a:solidFill>
+                  <a:schemeClr val="lt1"/>
+                </a:solidFill>
+                <a:latin typeface="+mn-lt"/>
+                <a:ea typeface="+mn-ea"/>
+                <a:cs typeface="+mn-cs"/>
+              </a:defRPr>
+            </a:lvl4pPr>
+            <a:lvl5pPr marL="1828800" algn="l" defTabSz="914400" rtl="0" eaLnBrk="1" latinLnBrk="0" hangingPunct="1">
+              <a:defRPr sz="1800" kern="1200">
+                <a:solidFill>
+                  <a:schemeClr val="lt1"/>
+                </a:solidFill>
+                <a:latin typeface="+mn-lt"/>
+                <a:ea typeface="+mn-ea"/>
+                <a:cs typeface="+mn-cs"/>
+              </a:defRPr>
+            </a:lvl5pPr>
+            <a:lvl6pPr marL="2286000" algn="l" defTabSz="914400" rtl="0" eaLnBrk="1" latinLnBrk="0" hangingPunct="1">
+              <a:defRPr sz="1800" kern="1200">
+                <a:solidFill>
+                  <a:schemeClr val="lt1"/>
+                </a:solidFill>
+                <a:latin typeface="+mn-lt"/>
+                <a:ea typeface="+mn-ea"/>
+                <a:cs typeface="+mn-cs"/>
+              </a:defRPr>
+            </a:lvl6pPr>
+            <a:lvl7pPr marL="2743200" algn="l" defTabSz="914400" rtl="0" eaLnBrk="1" latinLnBrk="0" hangingPunct="1">
+              <a:defRPr sz="1800" kern="1200">
+                <a:solidFill>
+                  <a:schemeClr val="lt1"/>
+                </a:solidFill>
+                <a:latin typeface="+mn-lt"/>
+                <a:ea typeface="+mn-ea"/>
+                <a:cs typeface="+mn-cs"/>
+              </a:defRPr>
+            </a:lvl7pPr>
+            <a:lvl8pPr marL="3200400" algn="l" defTabSz="914400" rtl="0" eaLnBrk="1" latinLnBrk="0" hangingPunct="1">
+              <a:defRPr sz="1800" kern="1200">
+                <a:solidFill>
+                  <a:schemeClr val="lt1"/>
+                </a:solidFill>
+                <a:latin typeface="+mn-lt"/>
+                <a:ea typeface="+mn-ea"/>
+                <a:cs typeface="+mn-cs"/>
+              </a:defRPr>
+            </a:lvl8pPr>
+            <a:lvl9pPr marL="3657600" algn="l" defTabSz="914400" rtl="0" eaLnBrk="1" latinLnBrk="0" hangingPunct="1">
+              <a:defRPr sz="1800" kern="1200">
+                <a:solidFill>
+                  <a:schemeClr val="lt1"/>
+                </a:solidFill>
+                <a:latin typeface="+mn-lt"/>
+                <a:ea typeface="+mn-ea"/>
+                <a:cs typeface="+mn-cs"/>
+              </a:defRPr>
+            </a:lvl9pPr>
+          </a:lstStyle>
+          <a:p>
+            <a:pPr algn="ctr"/>
+            <a:endParaRPr lang="en-US"/>
+          </a:p>
+        </p:txBody>
+      </p:sp>
+      <p:pic>
+        <p:nvPicPr>
+          <p:cNvPr id="5" name="Picture 4" descr="A white and blue gradient&#10;&#10;AI-generated content may be incorrect.">
+            <a:extLst>
+              <a:ext uri="{FF2B5EF4-FFF2-40B4-BE49-F238E27FC236}">
+                <a16:creationId xmlns:a16="http://schemas.microsoft.com/office/drawing/2014/main" id="{1182D46E-1F6D-D360-E995-AB5104DED3CB}"/>
+              </a:ext>
+            </a:extLst>
+          </p:cNvPr>
+          <p:cNvPicPr>
+            <a:picLocks noChangeAspect="1"/>
+          </p:cNvPicPr>
+          <p:nvPr/>
+        </p:nvPicPr>
+        <p:blipFill>
+          <a:blip r:embed="rId2"/>
+          <a:srcRect b="19"/>
+          <a:stretch>
+            <a:fillRect/>
+          </a:stretch>
+        </p:blipFill>
+        <p:spPr>
+          <a:xfrm>
+            <a:off x="20" y="1282"/>
+            <a:ext cx="12191980" cy="6856718"/>
+          </a:xfrm>
+          <a:prstGeom prst="rect">
+            <a:avLst/>
+          </a:prstGeom>
+        </p:spPr>
+      </p:pic>
+    </p:spTree>
+    <p:extLst>
+      <p:ext uri="{BB962C8B-B14F-4D97-AF65-F5344CB8AC3E}">
+        <p14:creationId xmlns:p14="http://schemas.microsoft.com/office/powerpoint/2010/main" val="2769515719"/>
       </p:ext>
     </p:extLst>
   </p:cSld>
